--- a/docs/presentation/abm-midterm-2026-05-07.pptx
+++ b/docs/presentation/abm-midterm-2026-05-07.pptx
@@ -10,9 +10,6 @@
     <p:sldId id="258" r:id="rId9"/>
     <p:sldId id="259" r:id="rId10"/>
     <p:sldId id="260" r:id="rId11"/>
-    <p:sldId id="261" r:id="rId12"/>
-    <p:sldId id="262" r:id="rId13"/>
-    <p:sldId id="263" r:id="rId14"/>
   </p:sldIdLst>
   <p:sldSz cx="12191695" cy="6858000" type="screen4x3"/>
   <p:notesSz cx="6858000" cy="9144000"/>
@@ -3097,16 +3094,16 @@
       <p:grpSpPr/>
       <p:sp>
         <p:nvSpPr>
-          <p:cNvPr id="2" name="Oval 1"/>
+          <p:cNvPr id="2" name="Rounded Rectangle 1"/>
           <p:cNvSpPr/>
           <p:nvPr/>
         </p:nvSpPr>
         <p:spPr>
           <a:xfrm>
-            <a:off x="548640" y="457200"/>
-            <a:ext cx="640080" cy="640080"/>
-          </a:xfrm>
-          <a:prstGeom prst="ellipse">
+            <a:off x="457200" y="457200"/>
+            <a:ext cx="868680" cy="640080"/>
+          </a:xfrm>
+          <a:prstGeom prst="roundRect">
             <a:avLst/>
           </a:prstGeom>
           <a:solidFill>
@@ -3142,7 +3139,7 @@
               </a:defRPr>
             </a:pPr>
             <a:r>
-              <a:t>1</a:t>
+              <a:t>7</a:t>
             </a:r>
           </a:p>
         </p:txBody>
@@ -3155,7 +3152,7 @@
         </p:nvSpPr>
         <p:spPr>
           <a:xfrm>
-            <a:off x="1371600" y="457200"/>
+            <a:off x="1508760" y="411480"/>
             <a:ext cx="10058400" cy="640080"/>
           </a:xfrm>
           <a:prstGeom prst="rect">
@@ -3170,27 +3167,62 @@
           <a:lstStyle/>
           <a:p>
             <a:pPr>
-              <a:defRPr sz="3200" b="1">
+              <a:defRPr sz="2800" b="1">
                 <a:solidFill>
                   <a:srgbClr val="1F2D4E"/>
                 </a:solidFill>
               </a:defRPr>
             </a:pPr>
             <a:r>
-              <a:t>문제 — 비용 vs 다양성</a:t>
-            </a:r>
-          </a:p>
-        </p:txBody>
-      </p:sp>
-      <p:sp>
-        <p:nvSpPr>
-          <p:cNvPr id="4" name="Rectangle 3"/>
+              <a:t>6 채널 → 26 테이블, 분산된 데이터를 한 곳으로</a:t>
+            </a:r>
+          </a:p>
+        </p:txBody>
+      </p:sp>
+      <p:sp>
+        <p:nvSpPr>
+          <p:cNvPr id="4" name="TextBox 3"/>
+          <p:cNvSpPr txBox="1"/>
+          <p:nvPr/>
+        </p:nvSpPr>
+        <p:spPr>
+          <a:xfrm>
+            <a:off x="1508760" y="960120"/>
+            <a:ext cx="10058400" cy="365760"/>
+          </a:xfrm>
+          <a:prstGeom prst="rect">
+            <a:avLst/>
+          </a:prstGeom>
+          <a:noFill/>
+        </p:spPr>
+        <p:txBody>
+          <a:bodyPr wrap="none">
+            <a:spAutoFit/>
+          </a:bodyPr>
+          <a:lstStyle/>
+          <a:p>
+            <a:pPr>
+              <a:defRPr sz="1400" i="1">
+                <a:solidFill>
+                  <a:srgbClr val="6B7280"/>
+                </a:solidFill>
+              </a:defRPr>
+            </a:pPr>
+            <a:r>
+              <a:t>PostgreSQL 메인 RDB · PGVector 법률 RAG</a:t>
+            </a:r>
+          </a:p>
+        </p:txBody>
+      </p:sp>
+      <p:sp>
+        <p:nvSpPr>
+          <p:cNvPr id="5" name="Rectangle 4"/>
           <p:cNvSpPr/>
           <p:nvPr/>
         </p:nvSpPr>
         <p:spPr>
           <a:xfrm>
-            <a:off x="548640" y="1234440"/>
+            <a:off x="457200" y="1417320"/>
             <a:ext cx="1371600" cy="45720"/>
           </a:xfrm>
           <a:prstGeom prst="rect">
@@ -3227,25 +3259,23 @@
       </p:sp>
       <p:sp>
         <p:nvSpPr>
-          <p:cNvPr id="5" name="Rounded Rectangle 4"/>
+          <p:cNvPr id="6" name="Rounded Rectangle 5"/>
           <p:cNvSpPr/>
           <p:nvPr/>
         </p:nvSpPr>
         <p:spPr>
           <a:xfrm>
-            <a:off x="914400" y="1828800"/>
-            <a:ext cx="3200400" cy="1828800"/>
+            <a:off x="457200" y="1691640"/>
+            <a:ext cx="1828800" cy="868680"/>
           </a:xfrm>
           <a:prstGeom prst="roundRect">
             <a:avLst/>
           </a:prstGeom>
           <a:solidFill>
-            <a:srgbClr val="F3F4F6"/>
-          </a:solidFill>
-          <a:ln w="25400">
-            <a:solidFill>
-              <a:srgbClr val="EF4444"/>
-            </a:solidFill>
+            <a:srgbClr val="3B82F6"/>
+          </a:solidFill>
+          <a:ln>
+            <a:noFill/>
           </a:ln>
         </p:spPr>
         <p:style>
@@ -3263,55 +3293,53 @@
           </a:fontRef>
         </p:style>
         <p:txBody>
-          <a:bodyPr rtlCol="0" anchor="ctr" wrap="square" tIns="182880"/>
+          <a:bodyPr rtlCol="0" anchor="ctr" wrap="square" tIns="73152"/>
           <a:lstStyle/>
           <a:p>
             <a:pPr algn="ctr">
-              <a:defRPr sz="4400" b="1">
-                <a:solidFill>
-                  <a:srgbClr val="EF4444"/>
-                </a:solidFill>
-              </a:defRPr>
-            </a:pPr>
-            <a:r>
-              <a:t>$0.37</a:t>
+              <a:defRPr sz="1500" b="1">
+                <a:solidFill>
+                  <a:srgbClr val="FFFFFF"/>
+                </a:solidFill>
+              </a:defRPr>
+            </a:pPr>
+            <a:r>
+              <a:t>KT</a:t>
             </a:r>
           </a:p>
           <a:p>
             <a:pPr algn="ctr">
-              <a:defRPr sz="1400">
-                <a:solidFill>
-                  <a:srgbClr val="374151"/>
-                </a:solidFill>
-              </a:defRPr>
-            </a:pPr>
-            <a:r>
-              <a:t>v1 run당 LLM 비용</a:t>
-            </a:r>
-          </a:p>
-        </p:txBody>
-      </p:sp>
-      <p:sp>
-        <p:nvSpPr>
-          <p:cNvPr id="6" name="Rounded Rectangle 5"/>
+              <a:defRPr sz="1100">
+                <a:solidFill>
+                  <a:srgbClr val="F3F4F6"/>
+                </a:solidFill>
+              </a:defRPr>
+            </a:pPr>
+            <a:r>
+              <a:t>생활인구</a:t>
+            </a:r>
+          </a:p>
+        </p:txBody>
+      </p:sp>
+      <p:sp>
+        <p:nvSpPr>
+          <p:cNvPr id="7" name="Rounded Rectangle 6"/>
           <p:cNvSpPr/>
           <p:nvPr/>
         </p:nvSpPr>
         <p:spPr>
           <a:xfrm>
-            <a:off x="4480560" y="1828800"/>
-            <a:ext cx="3200400" cy="1828800"/>
+            <a:off x="2404872" y="1691640"/>
+            <a:ext cx="1828800" cy="868680"/>
           </a:xfrm>
           <a:prstGeom prst="roundRect">
             <a:avLst/>
           </a:prstGeom>
           <a:solidFill>
-            <a:srgbClr val="F3F4F6"/>
-          </a:solidFill>
-          <a:ln w="25400">
-            <a:solidFill>
-              <a:srgbClr val="F59E0B"/>
-            </a:solidFill>
+            <a:srgbClr val="8B5CF6"/>
+          </a:solidFill>
+          <a:ln>
+            <a:noFill/>
           </a:ln>
         </p:spPr>
         <p:style>
@@ -3329,55 +3357,53 @@
           </a:fontRef>
         </p:style>
         <p:txBody>
-          <a:bodyPr rtlCol="0" anchor="ctr" wrap="square" tIns="182880"/>
+          <a:bodyPr rtlCol="0" anchor="ctr" wrap="square" tIns="73152"/>
           <a:lstStyle/>
           <a:p>
             <a:pPr algn="ctr">
-              <a:defRPr sz="4400" b="1">
-                <a:solidFill>
-                  <a:srgbClr val="F59E0B"/>
-                </a:solidFill>
-              </a:defRPr>
-            </a:pPr>
-            <a:r>
-              <a:t>0.58~0.76</a:t>
+              <a:defRPr sz="1500" b="1">
+                <a:solidFill>
+                  <a:srgbClr val="FFFFFF"/>
+                </a:solidFill>
+              </a:defRPr>
+            </a:pPr>
+            <a:r>
+              <a:t>카카오</a:t>
             </a:r>
           </a:p>
           <a:p>
             <a:pPr algn="ctr">
-              <a:defRPr sz="1400">
-                <a:solidFill>
-                  <a:srgbClr val="374151"/>
-                </a:solidFill>
-              </a:defRPr>
-            </a:pPr>
-            <a:r>
-              <a:t>v1 Pearson r</a:t>
-            </a:r>
-          </a:p>
-        </p:txBody>
-      </p:sp>
-      <p:sp>
-        <p:nvSpPr>
-          <p:cNvPr id="7" name="Rounded Rectangle 6"/>
+              <a:defRPr sz="1100">
+                <a:solidFill>
+                  <a:srgbClr val="F3F4F6"/>
+                </a:solidFill>
+              </a:defRPr>
+            </a:pPr>
+            <a:r>
+              <a:t>매장 16K</a:t>
+            </a:r>
+          </a:p>
+        </p:txBody>
+      </p:sp>
+      <p:sp>
+        <p:nvSpPr>
+          <p:cNvPr id="8" name="Rounded Rectangle 7"/>
           <p:cNvSpPr/>
           <p:nvPr/>
         </p:nvSpPr>
         <p:spPr>
           <a:xfrm>
-            <a:off x="8046720" y="1828800"/>
-            <a:ext cx="3200400" cy="1828800"/>
+            <a:off x="4352544" y="1691640"/>
+            <a:ext cx="1828800" cy="868680"/>
           </a:xfrm>
           <a:prstGeom prst="roundRect">
             <a:avLst/>
           </a:prstGeom>
           <a:solidFill>
-            <a:srgbClr val="F3F4F6"/>
-          </a:solidFill>
-          <a:ln w="25400">
-            <a:solidFill>
-              <a:srgbClr val="3B82F6"/>
-            </a:solidFill>
+            <a:srgbClr val="10B981"/>
+          </a:solidFill>
+          <a:ln>
+            <a:noFill/>
           </a:ln>
         </p:spPr>
         <p:style>
@@ -3395,98 +3421,896 @@
           </a:fontRef>
         </p:style>
         <p:txBody>
-          <a:bodyPr rtlCol="0" anchor="ctr" wrap="square" tIns="182880"/>
+          <a:bodyPr rtlCol="0" anchor="ctr" wrap="square" tIns="73152"/>
           <a:lstStyle/>
           <a:p>
             <a:pPr algn="ctr">
-              <a:defRPr sz="4400" b="1">
-                <a:solidFill>
-                  <a:srgbClr val="3B82F6"/>
-                </a:solidFill>
-              </a:defRPr>
-            </a:pPr>
-            <a:r>
-              <a:t>1000+</a:t>
+              <a:defRPr sz="1500" b="1">
+                <a:solidFill>
+                  <a:srgbClr val="FFFFFF"/>
+                </a:solidFill>
+              </a:defRPr>
+            </a:pPr>
+            <a:r>
+              <a:t>통계청</a:t>
             </a:r>
           </a:p>
           <a:p>
             <a:pPr algn="ctr">
-              <a:defRPr sz="1400">
-                <a:solidFill>
-                  <a:srgbClr val="374151"/>
-                </a:solidFill>
-              </a:defRPr>
-            </a:pPr>
-            <a:r>
-              <a:t>마포 에이전트</a:t>
-            </a:r>
-          </a:p>
-        </p:txBody>
-      </p:sp>
-      <p:sp>
-        <p:nvSpPr>
-          <p:cNvPr id="8" name="TextBox 7"/>
-          <p:cNvSpPr txBox="1"/>
+              <a:defRPr sz="1100">
+                <a:solidFill>
+                  <a:srgbClr val="F3F4F6"/>
+                </a:solidFill>
+              </a:defRPr>
+            </a:pPr>
+            <a:r>
+              <a:t>SGIS 인구·가구</a:t>
+            </a:r>
+          </a:p>
+        </p:txBody>
+      </p:sp>
+      <p:sp>
+        <p:nvSpPr>
+          <p:cNvPr id="9" name="Rounded Rectangle 8"/>
+          <p:cNvSpPr/>
           <p:nvPr/>
         </p:nvSpPr>
         <p:spPr>
           <a:xfrm>
-            <a:off x="914400" y="4114800"/>
-            <a:ext cx="10332720" cy="4572000"/>
-          </a:xfrm>
-          <a:prstGeom prst="rect">
+            <a:off x="6300216" y="1691640"/>
+            <a:ext cx="1828800" cy="868680"/>
+          </a:xfrm>
+          <a:prstGeom prst="roundRect">
             <a:avLst/>
           </a:prstGeom>
-          <a:noFill/>
-        </p:spPr>
-        <p:txBody>
-          <a:bodyPr wrap="square">
-            <a:spAutoFit/>
-          </a:bodyPr>
-          <a:lstStyle/>
+          <a:solidFill>
+            <a:srgbClr val="F59E0B"/>
+          </a:solidFill>
+          <a:ln>
+            <a:noFill/>
+          </a:ln>
+        </p:spPr>
+        <p:style>
+          <a:lnRef idx="1">
+            <a:schemeClr val="accent1"/>
+          </a:lnRef>
+          <a:fillRef idx="3">
+            <a:schemeClr val="accent1"/>
+          </a:fillRef>
+          <a:effectRef idx="2">
+            <a:schemeClr val="accent1"/>
+          </a:effectRef>
+          <a:fontRef idx="minor">
+            <a:schemeClr val="lt1"/>
+          </a:fontRef>
+        </p:style>
+        <p:txBody>
+          <a:bodyPr rtlCol="0" anchor="ctr" wrap="square" tIns="73152"/>
+          <a:lstStyle/>
+          <a:p>
+            <a:pPr algn="ctr">
+              <a:defRPr sz="1500" b="1">
+                <a:solidFill>
+                  <a:srgbClr val="FFFFFF"/>
+                </a:solidFill>
+              </a:defRPr>
+            </a:pPr>
+            <a:r>
+              <a:t>네이버</a:t>
+            </a:r>
+          </a:p>
+          <a:p>
+            <a:pPr algn="ctr">
+              <a:defRPr sz="1100">
+                <a:solidFill>
+                  <a:srgbClr val="F3F4F6"/>
+                </a:solidFill>
+              </a:defRPr>
+            </a:pPr>
+            <a:r>
+              <a:t>트렌드</a:t>
+            </a:r>
+          </a:p>
+        </p:txBody>
+      </p:sp>
+      <p:sp>
+        <p:nvSpPr>
+          <p:cNvPr id="10" name="Rounded Rectangle 9"/>
+          <p:cNvSpPr/>
+          <p:nvPr/>
+        </p:nvSpPr>
+        <p:spPr>
+          <a:xfrm>
+            <a:off x="8247888" y="1691640"/>
+            <a:ext cx="1828800" cy="868680"/>
+          </a:xfrm>
+          <a:prstGeom prst="roundRect">
+            <a:avLst/>
+          </a:prstGeom>
+          <a:solidFill>
+            <a:srgbClr val="EC4899"/>
+          </a:solidFill>
+          <a:ln>
+            <a:noFill/>
+          </a:ln>
+        </p:spPr>
+        <p:style>
+          <a:lnRef idx="1">
+            <a:schemeClr val="accent1"/>
+          </a:lnRef>
+          <a:fillRef idx="3">
+            <a:schemeClr val="accent1"/>
+          </a:fillRef>
+          <a:effectRef idx="2">
+            <a:schemeClr val="accent1"/>
+          </a:effectRef>
+          <a:fontRef idx="minor">
+            <a:schemeClr val="lt1"/>
+          </a:fontRef>
+        </p:style>
+        <p:txBody>
+          <a:bodyPr rtlCol="0" anchor="ctr" wrap="square" tIns="73152"/>
+          <a:lstStyle/>
+          <a:p>
+            <a:pPr algn="ctr">
+              <a:defRPr sz="1500" b="1">
+                <a:solidFill>
+                  <a:srgbClr val="FFFFFF"/>
+                </a:solidFill>
+              </a:defRPr>
+            </a:pPr>
+            <a:r>
+              <a:t>공정위</a:t>
+            </a:r>
+          </a:p>
+          <a:p>
+            <a:pPr algn="ctr">
+              <a:defRPr sz="1100">
+                <a:solidFill>
+                  <a:srgbClr val="F3F4F6"/>
+                </a:solidFill>
+              </a:defRPr>
+            </a:pPr>
+            <a:r>
+              <a:t>FTC 프랜차이즈</a:t>
+            </a:r>
+          </a:p>
+        </p:txBody>
+      </p:sp>
+      <p:sp>
+        <p:nvSpPr>
+          <p:cNvPr id="11" name="Rounded Rectangle 10"/>
+          <p:cNvSpPr/>
+          <p:nvPr/>
+        </p:nvSpPr>
+        <p:spPr>
+          <a:xfrm>
+            <a:off x="10195559" y="1691640"/>
+            <a:ext cx="1828800" cy="868680"/>
+          </a:xfrm>
+          <a:prstGeom prst="roundRect">
+            <a:avLst/>
+          </a:prstGeom>
+          <a:solidFill>
+            <a:srgbClr val="EF4444"/>
+          </a:solidFill>
+          <a:ln>
+            <a:noFill/>
+          </a:ln>
+        </p:spPr>
+        <p:style>
+          <a:lnRef idx="1">
+            <a:schemeClr val="accent1"/>
+          </a:lnRef>
+          <a:fillRef idx="3">
+            <a:schemeClr val="accent1"/>
+          </a:fillRef>
+          <a:effectRef idx="2">
+            <a:schemeClr val="accent1"/>
+          </a:effectRef>
+          <a:fontRef idx="minor">
+            <a:schemeClr val="lt1"/>
+          </a:fontRef>
+        </p:style>
+        <p:txBody>
+          <a:bodyPr rtlCol="0" anchor="ctr" wrap="square" tIns="73152"/>
+          <a:lstStyle/>
+          <a:p>
+            <a:pPr algn="ctr">
+              <a:defRPr sz="1500" b="1">
+                <a:solidFill>
+                  <a:srgbClr val="FFFFFF"/>
+                </a:solidFill>
+              </a:defRPr>
+            </a:pPr>
+            <a:r>
+              <a:t>서울</a:t>
+            </a:r>
+          </a:p>
+          <a:p>
+            <a:pPr algn="ctr">
+              <a:defRPr sz="1100">
+                <a:solidFill>
+                  <a:srgbClr val="F3F4F6"/>
+                </a:solidFill>
+              </a:defRPr>
+            </a:pPr>
+            <a:r>
+              <a:t>상권 매출·임대</a:t>
+            </a:r>
+          </a:p>
+        </p:txBody>
+      </p:sp>
+      <p:sp>
+        <p:nvSpPr>
+          <p:cNvPr id="12" name="Down Arrow 11"/>
+          <p:cNvSpPr/>
+          <p:nvPr/>
+        </p:nvSpPr>
+        <p:spPr>
+          <a:xfrm>
+            <a:off x="868680" y="2697480"/>
+            <a:ext cx="365760" cy="365760"/>
+          </a:xfrm>
+          <a:prstGeom prst="downArrow">
+            <a:avLst/>
+          </a:prstGeom>
+          <a:solidFill>
+            <a:srgbClr val="1F2D4E"/>
+          </a:solidFill>
+          <a:ln>
+            <a:noFill/>
+          </a:ln>
+        </p:spPr>
+        <p:style>
+          <a:lnRef idx="1">
+            <a:schemeClr val="accent1"/>
+          </a:lnRef>
+          <a:fillRef idx="3">
+            <a:schemeClr val="accent1"/>
+          </a:fillRef>
+          <a:effectRef idx="2">
+            <a:schemeClr val="accent1"/>
+          </a:effectRef>
+          <a:fontRef idx="minor">
+            <a:schemeClr val="lt1"/>
+          </a:fontRef>
+        </p:style>
+        <p:txBody>
+          <a:bodyPr rtlCol="0" anchor="ctr"/>
+          <a:lstStyle/>
+          <a:p>
+            <a:pPr algn="ctr"/>
+          </a:p>
+        </p:txBody>
+      </p:sp>
+      <p:sp>
+        <p:nvSpPr>
+          <p:cNvPr id="13" name="Down Arrow 12"/>
+          <p:cNvSpPr/>
+          <p:nvPr/>
+        </p:nvSpPr>
+        <p:spPr>
+          <a:xfrm>
+            <a:off x="2788920" y="2697480"/>
+            <a:ext cx="365760" cy="365760"/>
+          </a:xfrm>
+          <a:prstGeom prst="downArrow">
+            <a:avLst/>
+          </a:prstGeom>
+          <a:solidFill>
+            <a:srgbClr val="1F2D4E"/>
+          </a:solidFill>
+          <a:ln>
+            <a:noFill/>
+          </a:ln>
+        </p:spPr>
+        <p:style>
+          <a:lnRef idx="1">
+            <a:schemeClr val="accent1"/>
+          </a:lnRef>
+          <a:fillRef idx="3">
+            <a:schemeClr val="accent1"/>
+          </a:fillRef>
+          <a:effectRef idx="2">
+            <a:schemeClr val="accent1"/>
+          </a:effectRef>
+          <a:fontRef idx="minor">
+            <a:schemeClr val="lt1"/>
+          </a:fontRef>
+        </p:style>
+        <p:txBody>
+          <a:bodyPr rtlCol="0" anchor="ctr"/>
+          <a:lstStyle/>
+          <a:p>
+            <a:pPr algn="ctr"/>
+          </a:p>
+        </p:txBody>
+      </p:sp>
+      <p:sp>
+        <p:nvSpPr>
+          <p:cNvPr id="14" name="Down Arrow 13"/>
+          <p:cNvSpPr/>
+          <p:nvPr/>
+        </p:nvSpPr>
+        <p:spPr>
+          <a:xfrm>
+            <a:off x="4709160" y="2697480"/>
+            <a:ext cx="365760" cy="365760"/>
+          </a:xfrm>
+          <a:prstGeom prst="downArrow">
+            <a:avLst/>
+          </a:prstGeom>
+          <a:solidFill>
+            <a:srgbClr val="1F2D4E"/>
+          </a:solidFill>
+          <a:ln>
+            <a:noFill/>
+          </a:ln>
+        </p:spPr>
+        <p:style>
+          <a:lnRef idx="1">
+            <a:schemeClr val="accent1"/>
+          </a:lnRef>
+          <a:fillRef idx="3">
+            <a:schemeClr val="accent1"/>
+          </a:fillRef>
+          <a:effectRef idx="2">
+            <a:schemeClr val="accent1"/>
+          </a:effectRef>
+          <a:fontRef idx="minor">
+            <a:schemeClr val="lt1"/>
+          </a:fontRef>
+        </p:style>
+        <p:txBody>
+          <a:bodyPr rtlCol="0" anchor="ctr"/>
+          <a:lstStyle/>
+          <a:p>
+            <a:pPr algn="ctr"/>
+          </a:p>
+        </p:txBody>
+      </p:sp>
+      <p:sp>
+        <p:nvSpPr>
+          <p:cNvPr id="15" name="Down Arrow 14"/>
+          <p:cNvSpPr/>
+          <p:nvPr/>
+        </p:nvSpPr>
+        <p:spPr>
+          <a:xfrm>
+            <a:off x="6629400" y="2697480"/>
+            <a:ext cx="365760" cy="365760"/>
+          </a:xfrm>
+          <a:prstGeom prst="downArrow">
+            <a:avLst/>
+          </a:prstGeom>
+          <a:solidFill>
+            <a:srgbClr val="1F2D4E"/>
+          </a:solidFill>
+          <a:ln>
+            <a:noFill/>
+          </a:ln>
+        </p:spPr>
+        <p:style>
+          <a:lnRef idx="1">
+            <a:schemeClr val="accent1"/>
+          </a:lnRef>
+          <a:fillRef idx="3">
+            <a:schemeClr val="accent1"/>
+          </a:fillRef>
+          <a:effectRef idx="2">
+            <a:schemeClr val="accent1"/>
+          </a:effectRef>
+          <a:fontRef idx="minor">
+            <a:schemeClr val="lt1"/>
+          </a:fontRef>
+        </p:style>
+        <p:txBody>
+          <a:bodyPr rtlCol="0" anchor="ctr"/>
+          <a:lstStyle/>
+          <a:p>
+            <a:pPr algn="ctr"/>
+          </a:p>
+        </p:txBody>
+      </p:sp>
+      <p:sp>
+        <p:nvSpPr>
+          <p:cNvPr id="16" name="Down Arrow 15"/>
+          <p:cNvSpPr/>
+          <p:nvPr/>
+        </p:nvSpPr>
+        <p:spPr>
+          <a:xfrm>
+            <a:off x="8549640" y="2697480"/>
+            <a:ext cx="365760" cy="365760"/>
+          </a:xfrm>
+          <a:prstGeom prst="downArrow">
+            <a:avLst/>
+          </a:prstGeom>
+          <a:solidFill>
+            <a:srgbClr val="1F2D4E"/>
+          </a:solidFill>
+          <a:ln>
+            <a:noFill/>
+          </a:ln>
+        </p:spPr>
+        <p:style>
+          <a:lnRef idx="1">
+            <a:schemeClr val="accent1"/>
+          </a:lnRef>
+          <a:fillRef idx="3">
+            <a:schemeClr val="accent1"/>
+          </a:fillRef>
+          <a:effectRef idx="2">
+            <a:schemeClr val="accent1"/>
+          </a:effectRef>
+          <a:fontRef idx="minor">
+            <a:schemeClr val="lt1"/>
+          </a:fontRef>
+        </p:style>
+        <p:txBody>
+          <a:bodyPr rtlCol="0" anchor="ctr"/>
+          <a:lstStyle/>
+          <a:p>
+            <a:pPr algn="ctr"/>
+          </a:p>
+        </p:txBody>
+      </p:sp>
+      <p:sp>
+        <p:nvSpPr>
+          <p:cNvPr id="17" name="Down Arrow 16"/>
+          <p:cNvSpPr/>
+          <p:nvPr/>
+        </p:nvSpPr>
+        <p:spPr>
+          <a:xfrm>
+            <a:off x="10469880" y="2697480"/>
+            <a:ext cx="365760" cy="365760"/>
+          </a:xfrm>
+          <a:prstGeom prst="downArrow">
+            <a:avLst/>
+          </a:prstGeom>
+          <a:solidFill>
+            <a:srgbClr val="1F2D4E"/>
+          </a:solidFill>
+          <a:ln>
+            <a:noFill/>
+          </a:ln>
+        </p:spPr>
+        <p:style>
+          <a:lnRef idx="1">
+            <a:schemeClr val="accent1"/>
+          </a:lnRef>
+          <a:fillRef idx="3">
+            <a:schemeClr val="accent1"/>
+          </a:fillRef>
+          <a:effectRef idx="2">
+            <a:schemeClr val="accent1"/>
+          </a:effectRef>
+          <a:fontRef idx="minor">
+            <a:schemeClr val="lt1"/>
+          </a:fontRef>
+        </p:style>
+        <p:txBody>
+          <a:bodyPr rtlCol="0" anchor="ctr"/>
+          <a:lstStyle/>
+          <a:p>
+            <a:pPr algn="ctr"/>
+          </a:p>
+        </p:txBody>
+      </p:sp>
+      <p:sp>
+        <p:nvSpPr>
+          <p:cNvPr id="18" name="Rounded Rectangle 17"/>
+          <p:cNvSpPr/>
+          <p:nvPr/>
+        </p:nvSpPr>
+        <p:spPr>
+          <a:xfrm>
+            <a:off x="2286000" y="3246120"/>
+            <a:ext cx="7589520" cy="1188720"/>
+          </a:xfrm>
+          <a:prstGeom prst="roundRect">
+            <a:avLst/>
+          </a:prstGeom>
+          <a:solidFill>
+            <a:srgbClr val="1F2D4E"/>
+          </a:solidFill>
+          <a:ln>
+            <a:noFill/>
+          </a:ln>
+        </p:spPr>
+        <p:style>
+          <a:lnRef idx="1">
+            <a:schemeClr val="accent1"/>
+          </a:lnRef>
+          <a:fillRef idx="3">
+            <a:schemeClr val="accent1"/>
+          </a:fillRef>
+          <a:effectRef idx="2">
+            <a:schemeClr val="accent1"/>
+          </a:effectRef>
+          <a:fontRef idx="minor">
+            <a:schemeClr val="lt1"/>
+          </a:fontRef>
+        </p:style>
+        <p:txBody>
+          <a:bodyPr rtlCol="0" anchor="ctr" tIns="182880"/>
+          <a:lstStyle/>
+          <a:p>
+            <a:pPr algn="ctr">
+              <a:defRPr sz="2400" b="1">
+                <a:solidFill>
+                  <a:srgbClr val="FFFFFF"/>
+                </a:solidFill>
+              </a:defRPr>
+            </a:pPr>
+            <a:r>
+              <a:t>PostgreSQL — 26 테이블</a:t>
+            </a:r>
+          </a:p>
+          <a:p>
+            <a:pPr algn="ctr">
+              <a:spcBef>
+                <a:spcPts val="400"/>
+              </a:spcBef>
+              <a:defRPr sz="1300">
+                <a:solidFill>
+                  <a:srgbClr val="F3F4F6"/>
+                </a:solidFill>
+              </a:defRPr>
+            </a:pPr>
+            <a:r>
+              <a:t>SQLAlchemy 2.0 async · pool 25 · alembic 30+ migration</a:t>
+            </a:r>
+          </a:p>
+        </p:txBody>
+      </p:sp>
+      <p:sp>
+        <p:nvSpPr>
+          <p:cNvPr id="19" name="Rounded Rectangle 18"/>
+          <p:cNvSpPr/>
+          <p:nvPr/>
+        </p:nvSpPr>
+        <p:spPr>
+          <a:xfrm>
+            <a:off x="457200" y="4663440"/>
+            <a:ext cx="2743200" cy="1005840"/>
+          </a:xfrm>
+          <a:prstGeom prst="roundRect">
+            <a:avLst/>
+          </a:prstGeom>
+          <a:solidFill>
+            <a:srgbClr val="F3F4F6"/>
+          </a:solidFill>
+          <a:ln w="19050">
+            <a:solidFill>
+              <a:srgbClr val="3B82F6"/>
+            </a:solidFill>
+          </a:ln>
+        </p:spPr>
+        <p:style>
+          <a:lnRef idx="1">
+            <a:schemeClr val="accent1"/>
+          </a:lnRef>
+          <a:fillRef idx="3">
+            <a:schemeClr val="accent1"/>
+          </a:fillRef>
+          <a:effectRef idx="2">
+            <a:schemeClr val="accent1"/>
+          </a:effectRef>
+          <a:fontRef idx="minor">
+            <a:schemeClr val="lt1"/>
+          </a:fontRef>
+        </p:style>
+        <p:txBody>
+          <a:bodyPr rtlCol="0" anchor="ctr" wrap="square" lIns="137160" tIns="91440"/>
+          <a:lstStyle/>
+          <a:p>
+            <a:pPr algn="ctr">
+              <a:defRPr sz="1300" b="1">
+                <a:solidFill>
+                  <a:srgbClr val="3B82F6"/>
+                </a:solidFill>
+              </a:defRPr>
+            </a:pPr>
+            <a:r>
+              <a:t>상권/매출</a:t>
+            </a:r>
+          </a:p>
           <a:p>
             <a:pPr>
-              <a:spcAft>
-                <a:spcPts val="1800"/>
-              </a:spcAft>
-              <a:defRPr sz="2000">
+              <a:spcBef>
+                <a:spcPts val="300"/>
+              </a:spcBef>
+              <a:defRPr sz="1000">
                 <a:solidFill>
                   <a:srgbClr val="374151"/>
                 </a:solidFill>
-              </a:defRPr>
-            </a:pPr>
-            <a:r>
-              <a:t>매 tick LLM 호출 → agent·일수 늘릴수록 비용 폭증</a:t>
+                <a:latin typeface="Consolas"/>
+              </a:defRPr>
+            </a:pPr>
+            <a:r>
+              <a:t>district_sales · golmok_*</a:t>
+            </a:r>
+          </a:p>
+        </p:txBody>
+      </p:sp>
+      <p:sp>
+        <p:nvSpPr>
+          <p:cNvPr id="20" name="Rounded Rectangle 19"/>
+          <p:cNvSpPr/>
+          <p:nvPr/>
+        </p:nvSpPr>
+        <p:spPr>
+          <a:xfrm>
+            <a:off x="3383280" y="4663440"/>
+            <a:ext cx="2743200" cy="1005840"/>
+          </a:xfrm>
+          <a:prstGeom prst="roundRect">
+            <a:avLst/>
+          </a:prstGeom>
+          <a:solidFill>
+            <a:srgbClr val="F3F4F6"/>
+          </a:solidFill>
+          <a:ln w="19050">
+            <a:solidFill>
+              <a:srgbClr val="10B981"/>
+            </a:solidFill>
+          </a:ln>
+        </p:spPr>
+        <p:style>
+          <a:lnRef idx="1">
+            <a:schemeClr val="accent1"/>
+          </a:lnRef>
+          <a:fillRef idx="3">
+            <a:schemeClr val="accent1"/>
+          </a:fillRef>
+          <a:effectRef idx="2">
+            <a:schemeClr val="accent1"/>
+          </a:effectRef>
+          <a:fontRef idx="minor">
+            <a:schemeClr val="lt1"/>
+          </a:fontRef>
+        </p:style>
+        <p:txBody>
+          <a:bodyPr rtlCol="0" anchor="ctr" wrap="square" lIns="137160" tIns="91440"/>
+          <a:lstStyle/>
+          <a:p>
+            <a:pPr algn="ctr">
+              <a:defRPr sz="1300" b="1">
+                <a:solidFill>
+                  <a:srgbClr val="10B981"/>
+                </a:solidFill>
+              </a:defRPr>
+            </a:pPr>
+            <a:r>
+              <a:t>인구</a:t>
             </a:r>
           </a:p>
           <a:p>
             <a:pPr>
-              <a:spcAft>
-                <a:spcPts val="1800"/>
-              </a:spcAft>
-              <a:defRPr sz="2000">
+              <a:spcBef>
+                <a:spcPts val="300"/>
+              </a:spcBef>
+              <a:defRPr sz="1000">
                 <a:solidFill>
                   <a:srgbClr val="374151"/>
                 </a:solidFill>
-              </a:defRPr>
-            </a:pPr>
-            <a:r>
-              <a:t>룰 기반만 쓰면 시간대·날씨 반응 다양성 손실</a:t>
+                <a:latin typeface="Consolas"/>
+              </a:defRPr>
+            </a:pPr>
+            <a:r>
+              <a:t>living_pop · sgis_* · resident_*</a:t>
+            </a:r>
+          </a:p>
+        </p:txBody>
+      </p:sp>
+      <p:sp>
+        <p:nvSpPr>
+          <p:cNvPr id="21" name="Rounded Rectangle 20"/>
+          <p:cNvSpPr/>
+          <p:nvPr/>
+        </p:nvSpPr>
+        <p:spPr>
+          <a:xfrm>
+            <a:off x="6309360" y="4663440"/>
+            <a:ext cx="2743200" cy="1005840"/>
+          </a:xfrm>
+          <a:prstGeom prst="roundRect">
+            <a:avLst/>
+          </a:prstGeom>
+          <a:solidFill>
+            <a:srgbClr val="F3F4F6"/>
+          </a:solidFill>
+          <a:ln w="19050">
+            <a:solidFill>
+              <a:srgbClr val="8B5CF6"/>
+            </a:solidFill>
+          </a:ln>
+        </p:spPr>
+        <p:style>
+          <a:lnRef idx="1">
+            <a:schemeClr val="accent1"/>
+          </a:lnRef>
+          <a:fillRef idx="3">
+            <a:schemeClr val="accent1"/>
+          </a:fillRef>
+          <a:effectRef idx="2">
+            <a:schemeClr val="accent1"/>
+          </a:effectRef>
+          <a:fontRef idx="minor">
+            <a:schemeClr val="lt1"/>
+          </a:fontRef>
+        </p:style>
+        <p:txBody>
+          <a:bodyPr rtlCol="0" anchor="ctr" wrap="square" lIns="137160" tIns="91440"/>
+          <a:lstStyle/>
+          <a:p>
+            <a:pPr algn="ctr">
+              <a:defRPr sz="1300" b="1">
+                <a:solidFill>
+                  <a:srgbClr val="8B5CF6"/>
+                </a:solidFill>
+              </a:defRPr>
+            </a:pPr>
+            <a:r>
+              <a:t>매장/브랜드</a:t>
             </a:r>
           </a:p>
           <a:p>
             <a:pPr>
-              <a:spcAft>
-                <a:spcPts val="1800"/>
-              </a:spcAft>
-              <a:defRPr sz="2000">
+              <a:spcBef>
+                <a:spcPts val="300"/>
+              </a:spcBef>
+              <a:defRPr sz="1000">
                 <a:solidFill>
                   <a:srgbClr val="374151"/>
                 </a:solidFill>
-              </a:defRPr>
-            </a:pPr>
-            <a:r>
-              <a:t>Optuna 100 trials = 비용 폭발 → 튜닝 불가</a:t>
+                <a:latin typeface="Consolas"/>
+              </a:defRPr>
+            </a:pPr>
+            <a:r>
+              <a:t>kakao_store · ftc_* · biz_*</a:t>
+            </a:r>
+          </a:p>
+        </p:txBody>
+      </p:sp>
+      <p:sp>
+        <p:nvSpPr>
+          <p:cNvPr id="22" name="Rounded Rectangle 21"/>
+          <p:cNvSpPr/>
+          <p:nvPr/>
+        </p:nvSpPr>
+        <p:spPr>
+          <a:xfrm>
+            <a:off x="9235440" y="4663440"/>
+            <a:ext cx="2743200" cy="1005840"/>
+          </a:xfrm>
+          <a:prstGeom prst="roundRect">
+            <a:avLst/>
+          </a:prstGeom>
+          <a:solidFill>
+            <a:srgbClr val="F3F4F6"/>
+          </a:solidFill>
+          <a:ln w="19050">
+            <a:solidFill>
+              <a:srgbClr val="F59E0B"/>
+            </a:solidFill>
+          </a:ln>
+        </p:spPr>
+        <p:style>
+          <a:lnRef idx="1">
+            <a:schemeClr val="accent1"/>
+          </a:lnRef>
+          <a:fillRef idx="3">
+            <a:schemeClr val="accent1"/>
+          </a:fillRef>
+          <a:effectRef idx="2">
+            <a:schemeClr val="accent1"/>
+          </a:effectRef>
+          <a:fontRef idx="minor">
+            <a:schemeClr val="lt1"/>
+          </a:fontRef>
+        </p:style>
+        <p:txBody>
+          <a:bodyPr rtlCol="0" anchor="ctr" wrap="square" lIns="137160" tIns="91440"/>
+          <a:lstStyle/>
+          <a:p>
+            <a:pPr algn="ctr">
+              <a:defRPr sz="1300" b="1">
+                <a:solidFill>
+                  <a:srgbClr val="F59E0B"/>
+                </a:solidFill>
+              </a:defRPr>
+            </a:pPr>
+            <a:r>
+              <a:t>부동산</a:t>
+            </a:r>
+          </a:p>
+          <a:p>
+            <a:pPr>
+              <a:spcBef>
+                <a:spcPts val="300"/>
+              </a:spcBef>
+              <a:defRPr sz="1000">
+                <a:solidFill>
+                  <a:srgbClr val="374151"/>
+                </a:solidFill>
+                <a:latin typeface="Consolas"/>
+              </a:defRPr>
+            </a:pPr>
+            <a:r>
+              <a:t>rent_cost · jeonse_* · apt_*</a:t>
+            </a:r>
+          </a:p>
+        </p:txBody>
+      </p:sp>
+      <p:sp>
+        <p:nvSpPr>
+          <p:cNvPr id="23" name="Rounded Rectangle 22"/>
+          <p:cNvSpPr/>
+          <p:nvPr/>
+        </p:nvSpPr>
+        <p:spPr>
+          <a:xfrm>
+            <a:off x="457200" y="5852160"/>
+            <a:ext cx="11247120" cy="777240"/>
+          </a:xfrm>
+          <a:prstGeom prst="roundRect">
+            <a:avLst/>
+          </a:prstGeom>
+          <a:solidFill>
+            <a:srgbClr val="FFFFFF"/>
+          </a:solidFill>
+          <a:ln w="25400">
+            <a:solidFill>
+              <a:srgbClr val="8B5CF6"/>
+            </a:solidFill>
+          </a:ln>
+        </p:spPr>
+        <p:style>
+          <a:lnRef idx="1">
+            <a:schemeClr val="accent1"/>
+          </a:lnRef>
+          <a:fillRef idx="3">
+            <a:schemeClr val="accent1"/>
+          </a:fillRef>
+          <a:effectRef idx="2">
+            <a:schemeClr val="accent1"/>
+          </a:effectRef>
+          <a:fontRef idx="minor">
+            <a:schemeClr val="lt1"/>
+          </a:fontRef>
+        </p:style>
+        <p:txBody>
+          <a:bodyPr rtlCol="0" anchor="ctr" wrap="square" lIns="274320" tIns="91440"/>
+          <a:lstStyle/>
+          <a:p>
+            <a:pPr algn="ctr">
+              <a:defRPr sz="1500" b="1">
+                <a:solidFill>
+                  <a:srgbClr val="8B5CF6"/>
+                </a:solidFill>
+              </a:defRPr>
+            </a:pPr>
+            <a:r>
+              <a:t>+  PGVector (법률 RAG)</a:t>
+            </a:r>
+          </a:p>
+          <a:p>
+            <a:pPr>
+              <a:spcBef>
+                <a:spcPts val="200"/>
+              </a:spcBef>
+              <a:defRPr sz="1200">
+                <a:solidFill>
+                  <a:srgbClr val="374151"/>
+                </a:solidFill>
+              </a:defRPr>
+            </a:pPr>
+            <a:r>
+              <a:t>BAAI/bge-m3 1024차원 임베딩 · HNSW index · 10K+ 법률 chunk</a:t>
             </a:r>
           </a:p>
         </p:txBody>
@@ -3511,16 +4335,16 @@
       <p:grpSpPr/>
       <p:sp>
         <p:nvSpPr>
-          <p:cNvPr id="2" name="Oval 1"/>
+          <p:cNvPr id="2" name="Rounded Rectangle 1"/>
           <p:cNvSpPr/>
           <p:nvPr/>
         </p:nvSpPr>
         <p:spPr>
           <a:xfrm>
-            <a:off x="548640" y="457200"/>
-            <a:ext cx="640080" cy="640080"/>
-          </a:xfrm>
-          <a:prstGeom prst="ellipse">
+            <a:off x="457200" y="457200"/>
+            <a:ext cx="868680" cy="640080"/>
+          </a:xfrm>
+          <a:prstGeom prst="roundRect">
             <a:avLst/>
           </a:prstGeom>
           <a:solidFill>
@@ -3556,7 +4380,7 @@
               </a:defRPr>
             </a:pPr>
             <a:r>
-              <a:t>2</a:t>
+              <a:t>17</a:t>
             </a:r>
           </a:p>
         </p:txBody>
@@ -3569,7 +4393,7 @@
         </p:nvSpPr>
         <p:spPr>
           <a:xfrm>
-            <a:off x="1371600" y="457200"/>
+            <a:off x="1508760" y="411480"/>
             <a:ext cx="10058400" cy="640080"/>
           </a:xfrm>
           <a:prstGeom prst="rect">
@@ -3584,14 +4408,14 @@
           <a:lstStyle/>
           <a:p>
             <a:pPr>
-              <a:defRPr sz="3200" b="1">
+              <a:defRPr sz="2800" b="1">
                 <a:solidFill>
                   <a:srgbClr val="1F2D4E"/>
                 </a:solidFill>
               </a:defRPr>
             </a:pPr>
             <a:r>
-              <a:t>3 Layer 하이브리드</a:t>
+              <a:t>카페 차리기 전, 1일 시뮬 × 5 seed로 미리 답을 본다</a:t>
             </a:r>
           </a:p>
         </p:txBody>
@@ -3604,7 +4428,7 @@
         </p:nvSpPr>
         <p:spPr>
           <a:xfrm>
-            <a:off x="548640" y="1234440"/>
+            <a:off x="457200" y="1417320"/>
             <a:ext cx="1371600" cy="45720"/>
           </a:xfrm>
           <a:prstGeom prst="rect">
@@ -3647,17 +4471,19 @@
         </p:nvSpPr>
         <p:spPr>
           <a:xfrm>
-            <a:off x="914400" y="2103120"/>
-            <a:ext cx="3383280" cy="3017520"/>
+            <a:off x="1371600" y="1828800"/>
+            <a:ext cx="9418320" cy="1371600"/>
           </a:xfrm>
           <a:prstGeom prst="roundRect">
             <a:avLst/>
           </a:prstGeom>
           <a:solidFill>
-            <a:srgbClr val="3B82F6"/>
-          </a:solidFill>
-          <a:ln>
-            <a:noFill/>
+            <a:srgbClr val="F3F4F6"/>
+          </a:solidFill>
+          <a:ln w="38100">
+            <a:solidFill>
+              <a:srgbClr val="3B82F6"/>
+            </a:solidFill>
           </a:ln>
         </p:spPr>
         <p:style>
@@ -3675,75 +4501,43 @@
           </a:fontRef>
         </p:style>
         <p:txBody>
-          <a:bodyPr rtlCol="0" anchor="ctr" wrap="square" tIns="365760"/>
+          <a:bodyPr rtlCol="0" anchor="ctr" wrap="square" lIns="457200" tIns="228600"/>
           <a:lstStyle/>
           <a:p>
             <a:pPr algn="ctr">
-              <a:defRPr sz="3600" b="1">
-                <a:solidFill>
-                  <a:srgbClr val="FFFFFF"/>
-                </a:solidFill>
-              </a:defRPr>
-            </a:pPr>
-            <a:r>
-              <a:t>L1</a:t>
-            </a:r>
-          </a:p>
-          <a:p>
-            <a:pPr algn="ctr">
-              <a:spcBef>
-                <a:spcPts val="2000"/>
-              </a:spcBef>
-              <a:defRPr sz="2200" b="1">
-                <a:solidFill>
-                  <a:srgbClr val="FFFFFF"/>
-                </a:solidFill>
-              </a:defRPr>
-            </a:pPr>
-            <a:r>
-              <a:t>Policy</a:t>
-            </a:r>
-            <a:br/>
-            <a:r>
-              <a:t>Generation</a:t>
-            </a:r>
-          </a:p>
-          <a:p>
-            <a:pPr algn="ctr">
-              <a:spcBef>
-                <a:spcPts val="1200"/>
-              </a:spcBef>
-              <a:defRPr sz="1600">
-                <a:solidFill>
-                  <a:srgbClr val="F3F4F6"/>
-                </a:solidFill>
-              </a:defRPr>
-            </a:pPr>
-            <a:r>
-              <a:t>LLM 11회</a:t>
-            </a:r>
-          </a:p>
-        </p:txBody>
-      </p:sp>
-      <p:sp>
-        <p:nvSpPr>
-          <p:cNvPr id="6" name="Right Arrow 5"/>
+              <a:defRPr sz="2600" b="1">
+                <a:solidFill>
+                  <a:srgbClr val="1F2D4E"/>
+                </a:solidFill>
+              </a:defRPr>
+            </a:pPr>
+            <a:r>
+              <a:t>“망원동 빈 가게에 카페 차리려는데, 잘 될까요?”</a:t>
+            </a:r>
+          </a:p>
+        </p:txBody>
+      </p:sp>
+      <p:sp>
+        <p:nvSpPr>
+          <p:cNvPr id="6" name="Rounded Rectangle 5"/>
           <p:cNvSpPr/>
           <p:nvPr/>
         </p:nvSpPr>
         <p:spPr>
           <a:xfrm>
-            <a:off x="4343400" y="3291840"/>
-            <a:ext cx="365760" cy="548640"/>
-          </a:xfrm>
-          <a:prstGeom prst="rightArrow">
+            <a:off x="548640" y="3383280"/>
+            <a:ext cx="5486400" cy="3017520"/>
+          </a:xfrm>
+          <a:prstGeom prst="roundRect">
             <a:avLst/>
           </a:prstGeom>
           <a:solidFill>
-            <a:srgbClr val="1F2D4E"/>
-          </a:solidFill>
-          <a:ln>
-            <a:noFill/>
+            <a:srgbClr val="FFFFFF"/>
+          </a:solidFill>
+          <a:ln w="31750">
+            <a:solidFill>
+              <a:srgbClr val="EF4444"/>
+            </a:solidFill>
           </a:ln>
         </p:spPr>
         <p:style>
@@ -3761,10 +4555,67 @@
           </a:fontRef>
         </p:style>
         <p:txBody>
-          <a:bodyPr rtlCol="0" anchor="ctr"/>
-          <a:lstStyle/>
-          <a:p>
-            <a:pPr algn="ctr"/>
+          <a:bodyPr rtlCol="0" anchor="ctr" wrap="square" lIns="228600" tIns="182880"/>
+          <a:lstStyle/>
+          <a:p>
+            <a:pPr algn="ctr">
+              <a:spcAft>
+                <a:spcPts val="1000"/>
+              </a:spcAft>
+              <a:defRPr sz="2200" b="1">
+                <a:solidFill>
+                  <a:srgbClr val="EF4444"/>
+                </a:solidFill>
+              </a:defRPr>
+            </a:pPr>
+            <a:r>
+              <a:t>기존 방식</a:t>
+            </a:r>
+          </a:p>
+          <a:p>
+            <a:pPr>
+              <a:spcAft>
+                <a:spcPts val="500"/>
+              </a:spcAft>
+              <a:defRPr sz="1800">
+                <a:solidFill>
+                  <a:srgbClr val="374151"/>
+                </a:solidFill>
+              </a:defRPr>
+            </a:pPr>
+            <a:r>
+              <a:t>· 부동산 수수료 + 컨설팅 수백만원</a:t>
+            </a:r>
+          </a:p>
+          <a:p>
+            <a:pPr>
+              <a:spcAft>
+                <a:spcPts val="500"/>
+              </a:spcAft>
+              <a:defRPr sz="1800">
+                <a:solidFill>
+                  <a:srgbClr val="374151"/>
+                </a:solidFill>
+              </a:defRPr>
+            </a:pPr>
+            <a:r>
+              <a:t>· 6개월 운영 후 망하면 손해 1억</a:t>
+            </a:r>
+          </a:p>
+          <a:p>
+            <a:pPr>
+              <a:spcAft>
+                <a:spcPts val="500"/>
+              </a:spcAft>
+              <a:defRPr sz="1800">
+                <a:solidFill>
+                  <a:srgbClr val="374151"/>
+                </a:solidFill>
+              </a:defRPr>
+            </a:pPr>
+            <a:r>
+              <a:t>· 실패 비용 = 실제 손실</a:t>
+            </a:r>
           </a:p>
         </p:txBody>
       </p:sp>
@@ -3776,17 +4627,19 @@
         </p:nvSpPr>
         <p:spPr>
           <a:xfrm>
-            <a:off x="4709160" y="2103120"/>
-            <a:ext cx="3383280" cy="3017520"/>
+            <a:off x="6263640" y="3383280"/>
+            <a:ext cx="5486400" cy="3017520"/>
           </a:xfrm>
           <a:prstGeom prst="roundRect">
             <a:avLst/>
           </a:prstGeom>
           <a:solidFill>
-            <a:srgbClr val="10B981"/>
-          </a:solidFill>
-          <a:ln>
-            <a:noFill/>
+            <a:srgbClr val="FFFFFF"/>
+          </a:solidFill>
+          <a:ln w="31750">
+            <a:solidFill>
+              <a:srgbClr val="10B981"/>
+            </a:solidFill>
           </a:ln>
         </p:spPr>
         <p:style>
@@ -3804,340 +4657,66 @@
           </a:fontRef>
         </p:style>
         <p:txBody>
-          <a:bodyPr rtlCol="0" anchor="ctr" wrap="square" tIns="365760"/>
+          <a:bodyPr rtlCol="0" anchor="ctr" wrap="square" lIns="228600" tIns="182880"/>
           <a:lstStyle/>
           <a:p>
             <a:pPr algn="ctr">
-              <a:defRPr sz="3600" b="1">
-                <a:solidFill>
-                  <a:srgbClr val="FFFFFF"/>
-                </a:solidFill>
-              </a:defRPr>
-            </a:pPr>
-            <a:r>
-              <a:t>L2</a:t>
-            </a:r>
-          </a:p>
-          <a:p>
-            <a:pPr algn="ctr">
-              <a:spcBef>
-                <a:spcPts val="2000"/>
-              </a:spcBef>
+              <a:spcAft>
+                <a:spcPts val="1000"/>
+              </a:spcAft>
               <a:defRPr sz="2200" b="1">
                 <a:solidFill>
-                  <a:srgbClr val="FFFFFF"/>
-                </a:solidFill>
-              </a:defRPr>
-            </a:pPr>
-            <a:r>
-              <a:t>Time +</a:t>
-            </a:r>
-            <a:br/>
-            <a:r>
-              <a:t>Archetype</a:t>
-            </a:r>
-          </a:p>
-          <a:p>
-            <a:pPr algn="ctr">
-              <a:spcBef>
-                <a:spcPts val="1200"/>
-              </a:spcBef>
-              <a:defRPr sz="1600">
-                <a:solidFill>
-                  <a:srgbClr val="F3F4F6"/>
-                </a:solidFill>
-              </a:defRPr>
-            </a:pPr>
-            <a:r>
-              <a:t>곱셈 테이블</a:t>
-            </a:r>
-          </a:p>
-        </p:txBody>
-      </p:sp>
-      <p:sp>
-        <p:nvSpPr>
-          <p:cNvPr id="8" name="Right Arrow 7"/>
-          <p:cNvSpPr/>
-          <p:nvPr/>
-        </p:nvSpPr>
-        <p:spPr>
-          <a:xfrm>
-            <a:off x="8138160" y="3291840"/>
-            <a:ext cx="365760" cy="548640"/>
-          </a:xfrm>
-          <a:prstGeom prst="rightArrow">
-            <a:avLst/>
-          </a:prstGeom>
-          <a:solidFill>
-            <a:srgbClr val="1F2D4E"/>
-          </a:solidFill>
-          <a:ln>
-            <a:noFill/>
-          </a:ln>
-        </p:spPr>
-        <p:style>
-          <a:lnRef idx="1">
-            <a:schemeClr val="accent1"/>
-          </a:lnRef>
-          <a:fillRef idx="3">
-            <a:schemeClr val="accent1"/>
-          </a:fillRef>
-          <a:effectRef idx="2">
-            <a:schemeClr val="accent1"/>
-          </a:effectRef>
-          <a:fontRef idx="minor">
-            <a:schemeClr val="lt1"/>
-          </a:fontRef>
-        </p:style>
-        <p:txBody>
-          <a:bodyPr rtlCol="0" anchor="ctr"/>
-          <a:lstStyle/>
-          <a:p>
-            <a:pPr algn="ctr"/>
-          </a:p>
-        </p:txBody>
-      </p:sp>
-      <p:sp>
-        <p:nvSpPr>
-          <p:cNvPr id="9" name="Rounded Rectangle 8"/>
-          <p:cNvSpPr/>
-          <p:nvPr/>
-        </p:nvSpPr>
-        <p:spPr>
-          <a:xfrm>
-            <a:off x="8503920" y="2103120"/>
-            <a:ext cx="3383280" cy="3017520"/>
-          </a:xfrm>
-          <a:prstGeom prst="roundRect">
-            <a:avLst/>
-          </a:prstGeom>
-          <a:solidFill>
-            <a:srgbClr val="F59E0B"/>
-          </a:solidFill>
-          <a:ln>
-            <a:noFill/>
-          </a:ln>
-        </p:spPr>
-        <p:style>
-          <a:lnRef idx="1">
-            <a:schemeClr val="accent1"/>
-          </a:lnRef>
-          <a:fillRef idx="3">
-            <a:schemeClr val="accent1"/>
-          </a:fillRef>
-          <a:effectRef idx="2">
-            <a:schemeClr val="accent1"/>
-          </a:effectRef>
-          <a:fontRef idx="minor">
-            <a:schemeClr val="lt1"/>
-          </a:fontRef>
-        </p:style>
-        <p:txBody>
-          <a:bodyPr rtlCol="0" anchor="ctr" wrap="square" tIns="365760"/>
-          <a:lstStyle/>
-          <a:p>
-            <a:pPr algn="ctr">
-              <a:defRPr sz="3600" b="1">
-                <a:solidFill>
-                  <a:srgbClr val="FFFFFF"/>
-                </a:solidFill>
-              </a:defRPr>
-            </a:pPr>
-            <a:r>
-              <a:t>L3</a:t>
-            </a:r>
-          </a:p>
-          <a:p>
-            <a:pPr algn="ctr">
-              <a:spcBef>
-                <a:spcPts val="2000"/>
-              </a:spcBef>
-              <a:defRPr sz="2200" b="1">
-                <a:solidFill>
-                  <a:srgbClr val="FFFFFF"/>
-                </a:solidFill>
-              </a:defRPr>
-            </a:pPr>
-            <a:r>
-              <a:t>Agent</a:t>
-            </a:r>
-            <a:br/>
-            <a:r>
-              <a:t>Decision</a:t>
-            </a:r>
-          </a:p>
-          <a:p>
-            <a:pPr algn="ctr">
-              <a:spcBef>
-                <a:spcPts val="1200"/>
-              </a:spcBef>
-              <a:defRPr sz="1600">
-                <a:solidFill>
-                  <a:srgbClr val="F3F4F6"/>
-                </a:solidFill>
-              </a:defRPr>
-            </a:pPr>
-            <a:r>
-              <a:t>Tier S/A/B</a:t>
-            </a:r>
-          </a:p>
-        </p:txBody>
-      </p:sp>
-      <p:sp>
-        <p:nvSpPr>
-          <p:cNvPr id="10" name="Rounded Rectangle 9"/>
-          <p:cNvSpPr/>
-          <p:nvPr/>
-        </p:nvSpPr>
-        <p:spPr>
-          <a:xfrm>
-            <a:off x="914400" y="5669280"/>
-            <a:ext cx="3383280" cy="411480"/>
-          </a:xfrm>
-          <a:prstGeom prst="roundRect">
-            <a:avLst/>
-          </a:prstGeom>
-          <a:solidFill>
-            <a:srgbClr val="3B82F6"/>
-          </a:solidFill>
-          <a:ln>
-            <a:noFill/>
-          </a:ln>
-        </p:spPr>
-        <p:style>
-          <a:lnRef idx="1">
-            <a:schemeClr val="accent1"/>
-          </a:lnRef>
-          <a:fillRef idx="3">
-            <a:schemeClr val="accent1"/>
-          </a:fillRef>
-          <a:effectRef idx="2">
-            <a:schemeClr val="accent1"/>
-          </a:effectRef>
-          <a:fontRef idx="minor">
-            <a:schemeClr val="lt1"/>
-          </a:fontRef>
-        </p:style>
-        <p:txBody>
-          <a:bodyPr rtlCol="0" anchor="ctr" lIns="137160"/>
-          <a:lstStyle/>
-          <a:p>
-            <a:pPr algn="ctr">
-              <a:defRPr sz="1300" b="1">
-                <a:solidFill>
-                  <a:srgbClr val="FFFFFF"/>
-                </a:solidFill>
-                <a:latin typeface="Consolas"/>
-              </a:defRPr>
-            </a:pPr>
-            <a:r>
-              <a:t>policy_generator.py</a:t>
-            </a:r>
-          </a:p>
-        </p:txBody>
-      </p:sp>
-      <p:sp>
-        <p:nvSpPr>
-          <p:cNvPr id="11" name="Rounded Rectangle 10"/>
-          <p:cNvSpPr/>
-          <p:nvPr/>
-        </p:nvSpPr>
-        <p:spPr>
-          <a:xfrm>
-            <a:off x="4709160" y="5669280"/>
-            <a:ext cx="3383280" cy="411480"/>
-          </a:xfrm>
-          <a:prstGeom prst="roundRect">
-            <a:avLst/>
-          </a:prstGeom>
-          <a:solidFill>
-            <a:srgbClr val="10B981"/>
-          </a:solidFill>
-          <a:ln>
-            <a:noFill/>
-          </a:ln>
-        </p:spPr>
-        <p:style>
-          <a:lnRef idx="1">
-            <a:schemeClr val="accent1"/>
-          </a:lnRef>
-          <a:fillRef idx="3">
-            <a:schemeClr val="accent1"/>
-          </a:fillRef>
-          <a:effectRef idx="2">
-            <a:schemeClr val="accent1"/>
-          </a:effectRef>
-          <a:fontRef idx="minor">
-            <a:schemeClr val="lt1"/>
-          </a:fontRef>
-        </p:style>
-        <p:txBody>
-          <a:bodyPr rtlCol="0" anchor="ctr" lIns="137160"/>
-          <a:lstStyle/>
-          <a:p>
-            <a:pPr algn="ctr">
-              <a:defRPr sz="1300" b="1">
-                <a:solidFill>
-                  <a:srgbClr val="FFFFFF"/>
-                </a:solidFill>
-                <a:latin typeface="Consolas"/>
-              </a:defRPr>
-            </a:pPr>
-            <a:r>
-              <a:t>archetypes.py</a:t>
-            </a:r>
-          </a:p>
-        </p:txBody>
-      </p:sp>
-      <p:sp>
-        <p:nvSpPr>
-          <p:cNvPr id="12" name="Rounded Rectangle 11"/>
-          <p:cNvSpPr/>
-          <p:nvPr/>
-        </p:nvSpPr>
-        <p:spPr>
-          <a:xfrm>
-            <a:off x="8503920" y="5669280"/>
-            <a:ext cx="3383280" cy="411480"/>
-          </a:xfrm>
-          <a:prstGeom prst="roundRect">
-            <a:avLst/>
-          </a:prstGeom>
-          <a:solidFill>
-            <a:srgbClr val="F59E0B"/>
-          </a:solidFill>
-          <a:ln>
-            <a:noFill/>
-          </a:ln>
-        </p:spPr>
-        <p:style>
-          <a:lnRef idx="1">
-            <a:schemeClr val="accent1"/>
-          </a:lnRef>
-          <a:fillRef idx="3">
-            <a:schemeClr val="accent1"/>
-          </a:fillRef>
-          <a:effectRef idx="2">
-            <a:schemeClr val="accent1"/>
-          </a:effectRef>
-          <a:fontRef idx="minor">
-            <a:schemeClr val="lt1"/>
-          </a:fontRef>
-        </p:style>
-        <p:txBody>
-          <a:bodyPr rtlCol="0" anchor="ctr" lIns="137160"/>
-          <a:lstStyle/>
-          <a:p>
-            <a:pPr algn="ctr">
-              <a:defRPr sz="1300" b="1">
-                <a:solidFill>
-                  <a:srgbClr val="FFFFFF"/>
-                </a:solidFill>
-                <a:latin typeface="Consolas"/>
-              </a:defRPr>
-            </a:pPr>
-            <a:r>
-              <a:t>brain.py + policy_executor.py</a:t>
+                  <a:srgbClr val="10B981"/>
+                </a:solidFill>
+              </a:defRPr>
+            </a:pPr>
+            <a:r>
+              <a:t>ABM</a:t>
+            </a:r>
+          </a:p>
+          <a:p>
+            <a:pPr>
+              <a:spcAft>
+                <a:spcPts val="500"/>
+              </a:spcAft>
+              <a:defRPr sz="1800">
+                <a:solidFill>
+                  <a:srgbClr val="374151"/>
+                </a:solidFill>
+              </a:defRPr>
+            </a:pPr>
+            <a:r>
+              <a:t>· 가상 시민 5,000명에게 카페 차려봄</a:t>
+            </a:r>
+          </a:p>
+          <a:p>
+            <a:pPr>
+              <a:spcAft>
+                <a:spcPts val="500"/>
+              </a:spcAft>
+              <a:defRPr sz="1800">
+                <a:solidFill>
+                  <a:srgbClr val="374151"/>
+                </a:solidFill>
+              </a:defRPr>
+            </a:pPr>
+            <a:r>
+              <a:t>· 1일 시뮬 × 5 seed (PSE) → 분기/연 환산</a:t>
+            </a:r>
+          </a:p>
+          <a:p>
+            <a:pPr>
+              <a:spcAft>
+                <a:spcPts val="500"/>
+              </a:spcAft>
+              <a:defRPr sz="1800">
+                <a:solidFill>
+                  <a:srgbClr val="374151"/>
+                </a:solidFill>
+              </a:defRPr>
+            </a:pPr>
+            <a:r>
+              <a:t>· 실패 비용 = 0원</a:t>
             </a:r>
           </a:p>
         </p:txBody>
@@ -4162,16 +4741,16 @@
       <p:grpSpPr/>
       <p:sp>
         <p:nvSpPr>
-          <p:cNvPr id="2" name="Oval 1"/>
+          <p:cNvPr id="2" name="Rounded Rectangle 1"/>
           <p:cNvSpPr/>
           <p:nvPr/>
         </p:nvSpPr>
         <p:spPr>
           <a:xfrm>
-            <a:off x="548640" y="457200"/>
-            <a:ext cx="640080" cy="640080"/>
-          </a:xfrm>
-          <a:prstGeom prst="ellipse">
+            <a:off x="457200" y="457200"/>
+            <a:ext cx="868680" cy="640080"/>
+          </a:xfrm>
+          <a:prstGeom prst="roundRect">
             <a:avLst/>
           </a:prstGeom>
           <a:solidFill>
@@ -4207,7 +4786,7 @@
               </a:defRPr>
             </a:pPr>
             <a:r>
-              <a:t>3</a:t>
+              <a:t>18</a:t>
             </a:r>
           </a:p>
         </p:txBody>
@@ -4220,7 +4799,7 @@
         </p:nvSpPr>
         <p:spPr>
           <a:xfrm>
-            <a:off x="1371600" y="457200"/>
+            <a:off x="1508760" y="411480"/>
             <a:ext cx="10058400" cy="640080"/>
           </a:xfrm>
           <a:prstGeom prst="rect">
@@ -4235,27 +4814,62 @@
           <a:lstStyle/>
           <a:p>
             <a:pPr>
-              <a:defRPr sz="3200" b="1">
+              <a:defRPr sz="2800" b="1">
                 <a:solidFill>
                   <a:srgbClr val="1F2D4E"/>
                 </a:solidFill>
               </a:defRPr>
             </a:pPr>
             <a:r>
-              <a:t>Layer 1 — Policy Generation</a:t>
-            </a:r>
-          </a:p>
-        </p:txBody>
-      </p:sp>
-      <p:sp>
-        <p:nvSpPr>
-          <p:cNvPr id="4" name="Rectangle 3"/>
+              <a:t>5,000명, NVIDIA 7,187 페르소나로 채운다</a:t>
+            </a:r>
+          </a:p>
+        </p:txBody>
+      </p:sp>
+      <p:sp>
+        <p:nvSpPr>
+          <p:cNvPr id="4" name="TextBox 3"/>
+          <p:cNvSpPr txBox="1"/>
+          <p:nvPr/>
+        </p:nvSpPr>
+        <p:spPr>
+          <a:xfrm>
+            <a:off x="1508760" y="960120"/>
+            <a:ext cx="10058400" cy="365760"/>
+          </a:xfrm>
+          <a:prstGeom prst="rect">
+            <a:avLst/>
+          </a:prstGeom>
+          <a:noFill/>
+        </p:spPr>
+        <p:txBody>
+          <a:bodyPr wrap="none">
+            <a:spAutoFit/>
+          </a:bodyPr>
+          <a:lstStyle/>
+          <a:p>
+            <a:pPr>
+              <a:defRPr sz="1400" i="1">
+                <a:solidFill>
+                  <a:srgbClr val="6B7280"/>
+                </a:solidFill>
+              </a:defRPr>
+            </a:pPr>
+            <a:r>
+              <a:t>기본 운영 LLM 0회 — Tier S Plan은 옵션 (Stanford UIST'23, default off)</a:t>
+            </a:r>
+          </a:p>
+        </p:txBody>
+      </p:sp>
+      <p:sp>
+        <p:nvSpPr>
+          <p:cNvPr id="5" name="Rectangle 4"/>
           <p:cNvSpPr/>
           <p:nvPr/>
         </p:nvSpPr>
         <p:spPr>
           <a:xfrm>
-            <a:off x="548640" y="1234440"/>
+            <a:off x="457200" y="1417320"/>
             <a:ext cx="1371600" cy="45720"/>
           </a:xfrm>
           <a:prstGeom prst="rect">
@@ -4292,14 +4906,14 @@
       </p:sp>
       <p:sp>
         <p:nvSpPr>
-          <p:cNvPr id="5" name="Rounded Rectangle 4"/>
+          <p:cNvPr id="6" name="Rounded Rectangle 5"/>
           <p:cNvSpPr/>
           <p:nvPr/>
         </p:nvSpPr>
         <p:spPr>
           <a:xfrm>
-            <a:off x="914400" y="1828800"/>
-            <a:ext cx="2743200" cy="1828800"/>
+            <a:off x="548640" y="1691640"/>
+            <a:ext cx="3657600" cy="1828800"/>
           </a:xfrm>
           <a:prstGeom prst="roundRect">
             <a:avLst/>
@@ -4307,9 +4921,9 @@
           <a:solidFill>
             <a:srgbClr val="F3F4F6"/>
           </a:solidFill>
-          <a:ln w="25400">
+          <a:ln w="31750">
             <a:solidFill>
-              <a:srgbClr val="3B82F6"/>
+              <a:srgbClr val="8B5CF6"/>
             </a:solidFill>
           </a:ln>
         </p:spPr>
@@ -4334,12 +4948,12 @@
             <a:pPr algn="ctr">
               <a:defRPr sz="4400" b="1">
                 <a:solidFill>
-                  <a:srgbClr val="3B82F6"/>
-                </a:solidFill>
-              </a:defRPr>
-            </a:pPr>
-            <a:r>
-              <a:t>11</a:t>
+                  <a:srgbClr val="8B5CF6"/>
+                </a:solidFill>
+              </a:defRPr>
+            </a:pPr>
+            <a:r>
+              <a:t>7,187</a:t>
             </a:r>
           </a:p>
           <a:p>
@@ -4351,21 +4965,21 @@
               </a:defRPr>
             </a:pPr>
             <a:r>
-              <a:t>LLM 호출 (1회)</a:t>
-            </a:r>
-          </a:p>
-        </p:txBody>
-      </p:sp>
-      <p:sp>
-        <p:nvSpPr>
-          <p:cNvPr id="6" name="Rounded Rectangle 5"/>
+              <a:t>NVIDIA Nemotron 합성 페르소나</a:t>
+            </a:r>
+          </a:p>
+        </p:txBody>
+      </p:sp>
+      <p:sp>
+        <p:nvSpPr>
+          <p:cNvPr id="7" name="Rounded Rectangle 6"/>
           <p:cNvSpPr/>
           <p:nvPr/>
         </p:nvSpPr>
         <p:spPr>
           <a:xfrm>
-            <a:off x="4023360" y="1828800"/>
-            <a:ext cx="2743200" cy="1828800"/>
+            <a:off x="4297680" y="1691640"/>
+            <a:ext cx="3657600" cy="1828800"/>
           </a:xfrm>
           <a:prstGeom prst="roundRect">
             <a:avLst/>
@@ -4373,9 +4987,9 @@
           <a:solidFill>
             <a:srgbClr val="F3F4F6"/>
           </a:solidFill>
-          <a:ln w="25400">
+          <a:ln w="31750">
             <a:solidFill>
-              <a:srgbClr val="10B981"/>
+              <a:srgbClr val="3B82F6"/>
             </a:solidFill>
           </a:ln>
         </p:spPr>
@@ -4398,14 +5012,14 @@
           <a:lstStyle/>
           <a:p>
             <a:pPr algn="ctr">
-              <a:defRPr sz="4400" b="1">
-                <a:solidFill>
-                  <a:srgbClr val="10B981"/>
-                </a:solidFill>
-              </a:defRPr>
-            </a:pPr>
-            <a:r>
-              <a:t>6 × 2</a:t>
+              <a:defRPr sz="3600" b="1">
+                <a:solidFill>
+                  <a:srgbClr val="3B82F6"/>
+                </a:solidFill>
+              </a:defRPr>
+            </a:pPr>
+            <a:r>
+              <a:t>26 컬럼</a:t>
             </a:r>
           </a:p>
           <a:p>
@@ -4417,21 +5031,21 @@
               </a:defRPr>
             </a:pPr>
             <a:r>
-              <a:t>role × weather</a:t>
-            </a:r>
-          </a:p>
-        </p:txBody>
-      </p:sp>
-      <p:sp>
-        <p:nvSpPr>
-          <p:cNvPr id="7" name="Rounded Rectangle 6"/>
+              <a:t>직업·학력·취미·가치관 등</a:t>
+            </a:r>
+          </a:p>
+        </p:txBody>
+      </p:sp>
+      <p:sp>
+        <p:nvSpPr>
+          <p:cNvPr id="8" name="Rounded Rectangle 7"/>
           <p:cNvSpPr/>
           <p:nvPr/>
         </p:nvSpPr>
         <p:spPr>
           <a:xfrm>
-            <a:off x="7132320" y="1828800"/>
-            <a:ext cx="2743200" cy="1828800"/>
+            <a:off x="8046720" y="1691640"/>
+            <a:ext cx="3703320" cy="1828800"/>
           </a:xfrm>
           <a:prstGeom prst="roundRect">
             <a:avLst/>
@@ -4439,9 +5053,9 @@
           <a:solidFill>
             <a:srgbClr val="F3F4F6"/>
           </a:solidFill>
-          <a:ln w="25400">
+          <a:ln w="31750">
             <a:solidFill>
-              <a:srgbClr val="8B5CF6"/>
+              <a:srgbClr val="10B981"/>
             </a:solidFill>
           </a:ln>
         </p:spPr>
@@ -4466,12 +5080,12 @@
             <a:pPr algn="ctr">
               <a:defRPr sz="4400" b="1">
                 <a:solidFill>
-                  <a:srgbClr val="8B5CF6"/>
-                </a:solidFill>
-              </a:defRPr>
-            </a:pPr>
-            <a:r>
-              <a:t>0</a:t>
+                  <a:srgbClr val="10B981"/>
+                </a:solidFill>
+              </a:defRPr>
+            </a:pPr>
+            <a:r>
+              <a:t>0회</a:t>
             </a:r>
           </a:p>
           <a:p>
@@ -4483,90 +5097,248 @@
               </a:defRPr>
             </a:pPr>
             <a:r>
-              <a:t>재실행 시 호출</a:t>
-            </a:r>
-          </a:p>
-        </p:txBody>
-      </p:sp>
-      <p:sp>
-        <p:nvSpPr>
-          <p:cNvPr id="8" name="TextBox 7"/>
-          <p:cNvSpPr txBox="1"/>
+              <a:t>vacancy 평가 LLM 호출</a:t>
+            </a:r>
+          </a:p>
+        </p:txBody>
+      </p:sp>
+      <p:sp>
+        <p:nvSpPr>
+          <p:cNvPr id="9" name="Rounded Rectangle 8"/>
+          <p:cNvSpPr/>
           <p:nvPr/>
         </p:nvSpPr>
         <p:spPr>
           <a:xfrm>
-            <a:off x="914400" y="4114800"/>
-            <a:ext cx="10332720" cy="4572000"/>
-          </a:xfrm>
-          <a:prstGeom prst="rect">
+            <a:off x="548640" y="3749039"/>
+            <a:ext cx="11109960" cy="1280160"/>
+          </a:xfrm>
+          <a:prstGeom prst="roundRect">
             <a:avLst/>
           </a:prstGeom>
-          <a:noFill/>
-        </p:spPr>
-        <p:txBody>
-          <a:bodyPr wrap="square">
-            <a:spAutoFit/>
-          </a:bodyPr>
-          <a:lstStyle/>
+          <a:solidFill>
+            <a:srgbClr val="1F2D4E"/>
+          </a:solidFill>
+          <a:ln>
+            <a:noFill/>
+          </a:ln>
+        </p:spPr>
+        <p:style>
+          <a:lnRef idx="1">
+            <a:schemeClr val="accent1"/>
+          </a:lnRef>
+          <a:fillRef idx="3">
+            <a:schemeClr val="accent1"/>
+          </a:fillRef>
+          <a:effectRef idx="2">
+            <a:schemeClr val="accent1"/>
+          </a:effectRef>
+          <a:fontRef idx="minor">
+            <a:schemeClr val="lt1"/>
+          </a:fontRef>
+        </p:style>
+        <p:txBody>
+          <a:bodyPr rtlCol="0" anchor="ctr" wrap="square" lIns="274320" tIns="182880"/>
+          <a:lstStyle/>
+          <a:p>
+            <a:pPr algn="ctr">
+              <a:defRPr sz="1700" b="1">
+                <a:solidFill>
+                  <a:srgbClr val="FFFFFF"/>
+                </a:solidFill>
+              </a:defRPr>
+            </a:pPr>
+            <a:r>
+              <a:t>Nemotron 7,187 (마포 합성)   →   sex + age_bucket 매칭 sample   →   5,000 가상 시민</a:t>
+            </a:r>
+          </a:p>
+          <a:p>
+            <a:pPr algn="ctr">
+              <a:spcBef>
+                <a:spcPts val="800"/>
+              </a:spcBef>
+              <a:defRPr sz="1300">
+                <a:solidFill>
+                  <a:srgbClr val="F3F4F6"/>
+                </a:solidFill>
+              </a:defRPr>
+            </a:pPr>
+            <a:r>
+              <a:t>occupation · education · hobbies · professional / sports / arts / culinary persona</a:t>
+            </a:r>
+          </a:p>
+        </p:txBody>
+      </p:sp>
+      <p:sp>
+        <p:nvSpPr>
+          <p:cNvPr id="10" name="Rounded Rectangle 9"/>
+          <p:cNvSpPr/>
+          <p:nvPr/>
+        </p:nvSpPr>
+        <p:spPr>
+          <a:xfrm>
+            <a:off x="548640" y="5212080"/>
+            <a:ext cx="5486400" cy="1371600"/>
+          </a:xfrm>
+          <a:prstGeom prst="roundRect">
+            <a:avLst/>
+          </a:prstGeom>
+          <a:solidFill>
+            <a:srgbClr val="FFFFFF"/>
+          </a:solidFill>
+          <a:ln w="31750">
+            <a:solidFill>
+              <a:srgbClr val="F59E0B"/>
+            </a:solidFill>
+          </a:ln>
+        </p:spPr>
+        <p:style>
+          <a:lnRef idx="1">
+            <a:schemeClr val="accent1"/>
+          </a:lnRef>
+          <a:fillRef idx="3">
+            <a:schemeClr val="accent1"/>
+          </a:fillRef>
+          <a:effectRef idx="2">
+            <a:schemeClr val="accent1"/>
+          </a:effectRef>
+          <a:fontRef idx="minor">
+            <a:schemeClr val="lt1"/>
+          </a:fontRef>
+        </p:style>
+        <p:txBody>
+          <a:bodyPr rtlCol="0" anchor="ctr" wrap="square" lIns="228600" tIns="182880"/>
+          <a:lstStyle/>
+          <a:p>
+            <a:pPr algn="ctr">
+              <a:spcAft>
+                <a:spcPts val="1000"/>
+              </a:spcAft>
+              <a:defRPr sz="1600" b="1">
+                <a:solidFill>
+                  <a:srgbClr val="F59E0B"/>
+                </a:solidFill>
+              </a:defRPr>
+            </a:pPr>
+            <a:r>
+              <a:t>행동 결정 (default)</a:t>
+            </a:r>
+          </a:p>
           <a:p>
             <a:pPr>
               <a:spcAft>
-                <a:spcPts val="1800"/>
+                <a:spcPts val="500"/>
               </a:spcAft>
-              <a:defRPr sz="2000">
+              <a:defRPr sz="1400">
                 <a:solidFill>
                   <a:srgbClr val="374151"/>
                 </a:solidFill>
               </a:defRPr>
             </a:pPr>
             <a:r>
-              <a:t>역할 6종 × 날씨 2종 = 11 base PersonaPolicy</a:t>
+              <a:t>· policy_executor.py — 순수 Python 가중합</a:t>
             </a:r>
           </a:p>
           <a:p>
             <a:pPr>
               <a:spcAft>
-                <a:spcPts val="1800"/>
+                <a:spcPts val="500"/>
               </a:spcAft>
-              <a:defRPr sz="2000">
+              <a:defRPr sz="1400">
                 <a:solidFill>
                   <a:srgbClr val="374151"/>
                 </a:solidFill>
               </a:defRPr>
             </a:pPr>
             <a:r>
-              <a:t>PersonaPolicy = 0~1 float 12 필드 + dong_affinity</a:t>
+              <a:t>· 거리·선호·dong_affinity·시간×동×연령</a:t>
+            </a:r>
+          </a:p>
+        </p:txBody>
+      </p:sp>
+      <p:sp>
+        <p:nvSpPr>
+          <p:cNvPr id="11" name="Rounded Rectangle 10"/>
+          <p:cNvSpPr/>
+          <p:nvPr/>
+        </p:nvSpPr>
+        <p:spPr>
+          <a:xfrm>
+            <a:off x="6263640" y="5212080"/>
+            <a:ext cx="5394960" cy="1371600"/>
+          </a:xfrm>
+          <a:prstGeom prst="roundRect">
+            <a:avLst/>
+          </a:prstGeom>
+          <a:solidFill>
+            <a:srgbClr val="FFFFFF"/>
+          </a:solidFill>
+          <a:ln w="31750">
+            <a:solidFill>
+              <a:srgbClr val="10B981"/>
+            </a:solidFill>
+          </a:ln>
+        </p:spPr>
+        <p:style>
+          <a:lnRef idx="1">
+            <a:schemeClr val="accent1"/>
+          </a:lnRef>
+          <a:fillRef idx="3">
+            <a:schemeClr val="accent1"/>
+          </a:fillRef>
+          <a:effectRef idx="2">
+            <a:schemeClr val="accent1"/>
+          </a:effectRef>
+          <a:fontRef idx="minor">
+            <a:schemeClr val="lt1"/>
+          </a:fontRef>
+        </p:style>
+        <p:txBody>
+          <a:bodyPr rtlCol="0" anchor="ctr" wrap="square" lIns="228600" tIns="182880"/>
+          <a:lstStyle/>
+          <a:p>
+            <a:pPr algn="ctr">
+              <a:spcAft>
+                <a:spcPts val="1000"/>
+              </a:spcAft>
+              <a:defRPr sz="1600" b="1">
+                <a:solidFill>
+                  <a:srgbClr val="10B981"/>
+                </a:solidFill>
+              </a:defRPr>
+            </a:pPr>
+            <a:r>
+              <a:t>옵션 LLM (use_llm_decisions=True)</a:t>
             </a:r>
           </a:p>
           <a:p>
             <a:pPr>
               <a:spcAft>
-                <a:spcPts val="1800"/>
+                <a:spcPts val="500"/>
               </a:spcAft>
-              <a:defRPr sz="2000">
+              <a:defRPr sz="1400">
                 <a:solidFill>
                   <a:srgbClr val="374151"/>
                 </a:solidFill>
               </a:defRPr>
             </a:pPr>
             <a:r>
-              <a:t>OpenAI gpt-4o-mini → Ollama qwen2.5:3b → mock</a:t>
+              <a:t>· Tier S 250명 하루 1회 plan batch (Stanford UIST'23)</a:t>
             </a:r>
           </a:p>
           <a:p>
             <a:pPr>
               <a:spcAft>
-                <a:spcPts val="1800"/>
+                <a:spcPts val="500"/>
               </a:spcAft>
-              <a:defRPr sz="2000">
+              <a:defRPr sz="1400">
                 <a:solidFill>
                   <a:srgbClr val="374151"/>
                 </a:solidFill>
               </a:defRPr>
             </a:pPr>
             <a:r>
-              <a:t>policy_cache.json 영속 → 재실행 0회</a:t>
+              <a:t>· vacancy 평가는 mock 강제 → Optuna 튜닝 가능</a:t>
             </a:r>
           </a:p>
         </p:txBody>
@@ -4591,16 +5363,16 @@
       <p:grpSpPr/>
       <p:sp>
         <p:nvSpPr>
-          <p:cNvPr id="2" name="Oval 1"/>
+          <p:cNvPr id="2" name="Rounded Rectangle 1"/>
           <p:cNvSpPr/>
           <p:nvPr/>
         </p:nvSpPr>
         <p:spPr>
           <a:xfrm>
-            <a:off x="548640" y="457200"/>
-            <a:ext cx="640080" cy="640080"/>
-          </a:xfrm>
-          <a:prstGeom prst="ellipse">
+            <a:off x="457200" y="457200"/>
+            <a:ext cx="868680" cy="640080"/>
+          </a:xfrm>
+          <a:prstGeom prst="roundRect">
             <a:avLst/>
           </a:prstGeom>
           <a:solidFill>
@@ -4636,7 +5408,7 @@
               </a:defRPr>
             </a:pPr>
             <a:r>
-              <a:t>4</a:t>
+              <a:t>19</a:t>
             </a:r>
           </a:p>
         </p:txBody>
@@ -4649,7 +5421,7 @@
         </p:nvSpPr>
         <p:spPr>
           <a:xfrm>
-            <a:off x="1371600" y="457200"/>
+            <a:off x="1508760" y="411480"/>
             <a:ext cx="10058400" cy="640080"/>
           </a:xfrm>
           <a:prstGeom prst="rect">
@@ -4664,14 +5436,14 @@
           <a:lstStyle/>
           <a:p>
             <a:pPr>
-              <a:defRPr sz="3200" b="1">
+              <a:defRPr sz="2800" b="1">
                 <a:solidFill>
                   <a:srgbClr val="1F2D4E"/>
                 </a:solidFill>
               </a:defRPr>
             </a:pPr>
             <a:r>
-              <a:t>Layer 2 — 시간 확장 + Archetype</a:t>
+              <a:t>사람처럼 행동하는 가상 시민 — 5 Layer 인간다움</a:t>
             </a:r>
           </a:p>
         </p:txBody>
@@ -4684,7 +5456,7 @@
         </p:nvSpPr>
         <p:spPr>
           <a:xfrm>
-            <a:off x="548640" y="1234440"/>
+            <a:off x="457200" y="1417320"/>
             <a:ext cx="1371600" cy="45720"/>
           </a:xfrm>
           <a:prstGeom prst="rect">
@@ -4721,20 +5493,211 @@
       </p:sp>
       <p:sp>
         <p:nvSpPr>
-          <p:cNvPr id="5" name="Rounded Rectangle 4"/>
+          <p:cNvPr id="5" name="Oval 4"/>
           <p:cNvSpPr/>
           <p:nvPr/>
         </p:nvSpPr>
         <p:spPr>
           <a:xfrm>
-            <a:off x="914400" y="1828800"/>
-            <a:ext cx="3200400" cy="1828800"/>
+            <a:off x="1005840" y="1691640"/>
+            <a:ext cx="1005840" cy="1005840"/>
+          </a:xfrm>
+          <a:prstGeom prst="ellipse">
+            <a:avLst/>
+          </a:prstGeom>
+          <a:solidFill>
+            <a:srgbClr val="3B82F6"/>
+          </a:solidFill>
+          <a:ln>
+            <a:noFill/>
+          </a:ln>
+        </p:spPr>
+        <p:style>
+          <a:lnRef idx="1">
+            <a:schemeClr val="accent1"/>
+          </a:lnRef>
+          <a:fillRef idx="3">
+            <a:schemeClr val="accent1"/>
+          </a:fillRef>
+          <a:effectRef idx="2">
+            <a:schemeClr val="accent1"/>
+          </a:effectRef>
+          <a:fontRef idx="minor">
+            <a:schemeClr val="lt1"/>
+          </a:fontRef>
+        </p:style>
+        <p:txBody>
+          <a:bodyPr rtlCol="0" anchor="ctr" lIns="0" tIns="0" bIns="0" rIns="0"/>
+          <a:lstStyle/>
+          <a:p>
+            <a:pPr algn="ctr">
+              <a:defRPr sz="2800" b="1">
+                <a:solidFill>
+                  <a:srgbClr val="FFFFFF"/>
+                </a:solidFill>
+              </a:defRPr>
+            </a:pPr>
+            <a:r>
+              <a:t>L1</a:t>
+            </a:r>
+          </a:p>
+        </p:txBody>
+      </p:sp>
+      <p:sp>
+        <p:nvSpPr>
+          <p:cNvPr id="6" name="Rounded Rectangle 5"/>
+          <p:cNvSpPr/>
+          <p:nvPr/>
+        </p:nvSpPr>
+        <p:spPr>
+          <a:xfrm>
+            <a:off x="365760" y="2880360"/>
+            <a:ext cx="2286000" cy="3291840"/>
           </a:xfrm>
           <a:prstGeom prst="roundRect">
             <a:avLst/>
           </a:prstGeom>
           <a:solidFill>
-            <a:srgbClr val="F3F4F6"/>
+            <a:srgbClr val="FFFFFF"/>
+          </a:solidFill>
+          <a:ln w="25400">
+            <a:solidFill>
+              <a:srgbClr val="3B82F6"/>
+            </a:solidFill>
+          </a:ln>
+        </p:spPr>
+        <p:style>
+          <a:lnRef idx="1">
+            <a:schemeClr val="accent1"/>
+          </a:lnRef>
+          <a:fillRef idx="3">
+            <a:schemeClr val="accent1"/>
+          </a:fillRef>
+          <a:effectRef idx="2">
+            <a:schemeClr val="accent1"/>
+          </a:effectRef>
+          <a:fontRef idx="minor">
+            <a:schemeClr val="lt1"/>
+          </a:fontRef>
+        </p:style>
+        <p:txBody>
+          <a:bodyPr rtlCol="0" anchor="ctr" wrap="square" lIns="182880" tIns="228600"/>
+          <a:lstStyle/>
+          <a:p>
+            <a:pPr algn="ctr">
+              <a:spcAft>
+                <a:spcPts val="1500"/>
+              </a:spcAft>
+              <a:defRPr sz="2000" b="1">
+                <a:solidFill>
+                  <a:srgbClr val="3B82F6"/>
+                </a:solidFill>
+              </a:defRPr>
+            </a:pPr>
+            <a:r>
+              <a:t>정책</a:t>
+            </a:r>
+          </a:p>
+          <a:p>
+            <a:pPr algn="ctr">
+              <a:spcAft>
+                <a:spcPts val="400"/>
+              </a:spcAft>
+              <a:defRPr sz="1200">
+                <a:solidFill>
+                  <a:srgbClr val="374151"/>
+                </a:solidFill>
+              </a:defRPr>
+            </a:pPr>
+            <a:r>
+              <a:t>성향 (mobility, 카테고리 선호)</a:t>
+            </a:r>
+          </a:p>
+          <a:p>
+            <a:pPr algn="ctr">
+              <a:spcAft>
+                <a:spcPts val="400"/>
+              </a:spcAft>
+              <a:defRPr sz="1200">
+                <a:solidFill>
+                  <a:srgbClr val="374151"/>
+                </a:solidFill>
+              </a:defRPr>
+            </a:pPr>
+            <a:r>
+              <a:t>role × weather × time_block</a:t>
+            </a:r>
+          </a:p>
+        </p:txBody>
+      </p:sp>
+      <p:sp>
+        <p:nvSpPr>
+          <p:cNvPr id="7" name="Oval 6"/>
+          <p:cNvSpPr/>
+          <p:nvPr/>
+        </p:nvSpPr>
+        <p:spPr>
+          <a:xfrm>
+            <a:off x="3337559" y="1691640"/>
+            <a:ext cx="1005840" cy="1005840"/>
+          </a:xfrm>
+          <a:prstGeom prst="ellipse">
+            <a:avLst/>
+          </a:prstGeom>
+          <a:solidFill>
+            <a:srgbClr val="10B981"/>
+          </a:solidFill>
+          <a:ln>
+            <a:noFill/>
+          </a:ln>
+        </p:spPr>
+        <p:style>
+          <a:lnRef idx="1">
+            <a:schemeClr val="accent1"/>
+          </a:lnRef>
+          <a:fillRef idx="3">
+            <a:schemeClr val="accent1"/>
+          </a:fillRef>
+          <a:effectRef idx="2">
+            <a:schemeClr val="accent1"/>
+          </a:effectRef>
+          <a:fontRef idx="minor">
+            <a:schemeClr val="lt1"/>
+          </a:fontRef>
+        </p:style>
+        <p:txBody>
+          <a:bodyPr rtlCol="0" anchor="ctr" lIns="0" tIns="0" bIns="0" rIns="0"/>
+          <a:lstStyle/>
+          <a:p>
+            <a:pPr algn="ctr">
+              <a:defRPr sz="2800" b="1">
+                <a:solidFill>
+                  <a:srgbClr val="FFFFFF"/>
+                </a:solidFill>
+              </a:defRPr>
+            </a:pPr>
+            <a:r>
+              <a:t>L2</a:t>
+            </a:r>
+          </a:p>
+        </p:txBody>
+      </p:sp>
+      <p:sp>
+        <p:nvSpPr>
+          <p:cNvPr id="8" name="Rounded Rectangle 7"/>
+          <p:cNvSpPr/>
+          <p:nvPr/>
+        </p:nvSpPr>
+        <p:spPr>
+          <a:xfrm>
+            <a:off x="2697479" y="2880360"/>
+            <a:ext cx="2286000" cy="3291840"/>
+          </a:xfrm>
+          <a:prstGeom prst="roundRect">
+            <a:avLst/>
+          </a:prstGeom>
+          <a:solidFill>
+            <a:srgbClr val="FFFFFF"/>
           </a:solidFill>
           <a:ln w="25400">
             <a:solidFill>
@@ -4757,55 +5720,74 @@
           </a:fontRef>
         </p:style>
         <p:txBody>
-          <a:bodyPr rtlCol="0" anchor="ctr" wrap="square" tIns="182880"/>
+          <a:bodyPr rtlCol="0" anchor="ctr" wrap="square" lIns="182880" tIns="228600"/>
           <a:lstStyle/>
           <a:p>
             <a:pPr algn="ctr">
-              <a:defRPr sz="4400" b="1">
+              <a:spcAft>
+                <a:spcPts val="1500"/>
+              </a:spcAft>
+              <a:defRPr sz="2000" b="1">
                 <a:solidFill>
                   <a:srgbClr val="10B981"/>
                 </a:solidFill>
               </a:defRPr>
             </a:pPr>
             <a:r>
-              <a:t>11 → 66</a:t>
+              <a:t>기억</a:t>
             </a:r>
           </a:p>
           <a:p>
             <a:pPr algn="ctr">
-              <a:defRPr sz="1400">
+              <a:spcAft>
+                <a:spcPts val="400"/>
+              </a:spcAft>
+              <a:defRPr sz="1200">
                 <a:solidFill>
                   <a:srgbClr val="374151"/>
                 </a:solidFill>
               </a:defRPr>
             </a:pPr>
             <a:r>
-              <a:t>정책 확장</a:t>
-            </a:r>
-          </a:p>
-        </p:txBody>
-      </p:sp>
-      <p:sp>
-        <p:nvSpPr>
-          <p:cNvPr id="6" name="Rounded Rectangle 5"/>
+              <a:t>visit_history · learned_prefs</a:t>
+            </a:r>
+          </a:p>
+          <a:p>
+            <a:pPr algn="ctr">
+              <a:spcAft>
+                <a:spcPts val="400"/>
+              </a:spcAft>
+              <a:defRPr sz="1200">
+                <a:solidFill>
+                  <a:srgbClr val="374151"/>
+                </a:solidFill>
+              </a:defRPr>
+            </a:pPr>
+            <a:r>
+              <a:t>blacklist · habit_store</a:t>
+            </a:r>
+          </a:p>
+        </p:txBody>
+      </p:sp>
+      <p:sp>
+        <p:nvSpPr>
+          <p:cNvPr id="9" name="Oval 8"/>
           <p:cNvSpPr/>
           <p:nvPr/>
         </p:nvSpPr>
         <p:spPr>
           <a:xfrm>
-            <a:off x="4480560" y="1828800"/>
-            <a:ext cx="3200400" cy="1828800"/>
-          </a:xfrm>
-          <a:prstGeom prst="roundRect">
+            <a:off x="5669280" y="1691640"/>
+            <a:ext cx="1005840" cy="1005840"/>
+          </a:xfrm>
+          <a:prstGeom prst="ellipse">
             <a:avLst/>
           </a:prstGeom>
           <a:solidFill>
-            <a:srgbClr val="F3F4F6"/>
-          </a:solidFill>
-          <a:ln w="25400">
-            <a:solidFill>
-              <a:srgbClr val="3B82F6"/>
-            </a:solidFill>
+            <a:srgbClr val="F59E0B"/>
+          </a:solidFill>
+          <a:ln>
+            <a:noFill/>
           </a:ln>
         </p:spPr>
         <p:style>
@@ -4823,50 +5805,38 @@
           </a:fontRef>
         </p:style>
         <p:txBody>
-          <a:bodyPr rtlCol="0" anchor="ctr" wrap="square" tIns="182880"/>
+          <a:bodyPr rtlCol="0" anchor="ctr" lIns="0" tIns="0" bIns="0" rIns="0"/>
           <a:lstStyle/>
           <a:p>
             <a:pPr algn="ctr">
-              <a:defRPr sz="4400" b="1">
-                <a:solidFill>
-                  <a:srgbClr val="3B82F6"/>
-                </a:solidFill>
-              </a:defRPr>
-            </a:pPr>
-            <a:r>
-              <a:t>30+</a:t>
-            </a:r>
-          </a:p>
-          <a:p>
-            <a:pPr algn="ctr">
-              <a:defRPr sz="1400">
-                <a:solidFill>
-                  <a:srgbClr val="374151"/>
-                </a:solidFill>
-              </a:defRPr>
-            </a:pPr>
-            <a:r>
-              <a:t>Archetype 종류</a:t>
-            </a:r>
-          </a:p>
-        </p:txBody>
-      </p:sp>
-      <p:sp>
-        <p:nvSpPr>
-          <p:cNvPr id="7" name="Rounded Rectangle 6"/>
+              <a:defRPr sz="2800" b="1">
+                <a:solidFill>
+                  <a:srgbClr val="FFFFFF"/>
+                </a:solidFill>
+              </a:defRPr>
+            </a:pPr>
+            <a:r>
+              <a:t>L3</a:t>
+            </a:r>
+          </a:p>
+        </p:txBody>
+      </p:sp>
+      <p:sp>
+        <p:nvSpPr>
+          <p:cNvPr id="10" name="Rounded Rectangle 9"/>
           <p:cNvSpPr/>
           <p:nvPr/>
         </p:nvSpPr>
         <p:spPr>
           <a:xfrm>
-            <a:off x="8046720" y="1828800"/>
-            <a:ext cx="3200400" cy="1828800"/>
+            <a:off x="5029200" y="2880360"/>
+            <a:ext cx="2286000" cy="3291840"/>
           </a:xfrm>
           <a:prstGeom prst="roundRect">
             <a:avLst/>
           </a:prstGeom>
           <a:solidFill>
-            <a:srgbClr val="F3F4F6"/>
+            <a:srgbClr val="FFFFFF"/>
           </a:solidFill>
           <a:ln w="25400">
             <a:solidFill>
@@ -4889,44 +5859,343 @@
           </a:fontRef>
         </p:style>
         <p:txBody>
-          <a:bodyPr rtlCol="0" anchor="ctr" wrap="square" tIns="182880"/>
+          <a:bodyPr rtlCol="0" anchor="ctr" wrap="square" lIns="182880" tIns="228600"/>
           <a:lstStyle/>
           <a:p>
             <a:pPr algn="ctr">
-              <a:defRPr sz="4400" b="1">
+              <a:spcAft>
+                <a:spcPts val="1500"/>
+              </a:spcAft>
+              <a:defRPr sz="2000" b="1">
                 <a:solidFill>
                   <a:srgbClr val="F59E0B"/>
                 </a:solidFill>
               </a:defRPr>
             </a:pPr>
             <a:r>
-              <a:t>±15%</a:t>
+              <a:t>내부 상태</a:t>
             </a:r>
           </a:p>
           <a:p>
             <a:pPr algn="ctr">
-              <a:defRPr sz="1400">
+              <a:spcAft>
+                <a:spcPts val="400"/>
+              </a:spcAft>
+              <a:defRPr sz="1200">
                 <a:solidFill>
                   <a:srgbClr val="374151"/>
                 </a:solidFill>
               </a:defRPr>
             </a:pPr>
             <a:r>
-              <a:t>개체 jitter</a:t>
-            </a:r>
-          </a:p>
-        </p:txBody>
-      </p:sp>
-      <p:sp>
-        <p:nvSpPr>
-          <p:cNvPr id="8" name="TextBox 7"/>
+              <a:t>hunger · fatigue · mood</a:t>
+            </a:r>
+          </a:p>
+          <a:p>
+            <a:pPr algn="ctr">
+              <a:spcAft>
+                <a:spcPts val="400"/>
+              </a:spcAft>
+              <a:defRPr sz="1200">
+                <a:solidFill>
+                  <a:srgbClr val="374151"/>
+                </a:solidFill>
+              </a:defRPr>
+            </a:pPr>
+            <a:r>
+              <a:t>매 tick 변화 → 의사결정 가중</a:t>
+            </a:r>
+          </a:p>
+        </p:txBody>
+      </p:sp>
+      <p:sp>
+        <p:nvSpPr>
+          <p:cNvPr id="11" name="Oval 10"/>
+          <p:cNvSpPr/>
+          <p:nvPr/>
+        </p:nvSpPr>
+        <p:spPr>
+          <a:xfrm>
+            <a:off x="8000999" y="1691640"/>
+            <a:ext cx="1005840" cy="1005840"/>
+          </a:xfrm>
+          <a:prstGeom prst="ellipse">
+            <a:avLst/>
+          </a:prstGeom>
+          <a:solidFill>
+            <a:srgbClr val="8B5CF6"/>
+          </a:solidFill>
+          <a:ln>
+            <a:noFill/>
+          </a:ln>
+        </p:spPr>
+        <p:style>
+          <a:lnRef idx="1">
+            <a:schemeClr val="accent1"/>
+          </a:lnRef>
+          <a:fillRef idx="3">
+            <a:schemeClr val="accent1"/>
+          </a:fillRef>
+          <a:effectRef idx="2">
+            <a:schemeClr val="accent1"/>
+          </a:effectRef>
+          <a:fontRef idx="minor">
+            <a:schemeClr val="lt1"/>
+          </a:fontRef>
+        </p:style>
+        <p:txBody>
+          <a:bodyPr rtlCol="0" anchor="ctr" lIns="0" tIns="0" bIns="0" rIns="0"/>
+          <a:lstStyle/>
+          <a:p>
+            <a:pPr algn="ctr">
+              <a:defRPr sz="2800" b="1">
+                <a:solidFill>
+                  <a:srgbClr val="FFFFFF"/>
+                </a:solidFill>
+              </a:defRPr>
+            </a:pPr>
+            <a:r>
+              <a:t>L4</a:t>
+            </a:r>
+          </a:p>
+        </p:txBody>
+      </p:sp>
+      <p:sp>
+        <p:nvSpPr>
+          <p:cNvPr id="12" name="Rounded Rectangle 11"/>
+          <p:cNvSpPr/>
+          <p:nvPr/>
+        </p:nvSpPr>
+        <p:spPr>
+          <a:xfrm>
+            <a:off x="7360919" y="2880360"/>
+            <a:ext cx="2286000" cy="3291840"/>
+          </a:xfrm>
+          <a:prstGeom prst="roundRect">
+            <a:avLst/>
+          </a:prstGeom>
+          <a:solidFill>
+            <a:srgbClr val="FFFFFF"/>
+          </a:solidFill>
+          <a:ln w="25400">
+            <a:solidFill>
+              <a:srgbClr val="8B5CF6"/>
+            </a:solidFill>
+          </a:ln>
+        </p:spPr>
+        <p:style>
+          <a:lnRef idx="1">
+            <a:schemeClr val="accent1"/>
+          </a:lnRef>
+          <a:fillRef idx="3">
+            <a:schemeClr val="accent1"/>
+          </a:fillRef>
+          <a:effectRef idx="2">
+            <a:schemeClr val="accent1"/>
+          </a:effectRef>
+          <a:fontRef idx="minor">
+            <a:schemeClr val="lt1"/>
+          </a:fontRef>
+        </p:style>
+        <p:txBody>
+          <a:bodyPr rtlCol="0" anchor="ctr" wrap="square" lIns="182880" tIns="228600"/>
+          <a:lstStyle/>
+          <a:p>
+            <a:pPr algn="ctr">
+              <a:spcAft>
+                <a:spcPts val="1500"/>
+              </a:spcAft>
+              <a:defRPr sz="2000" b="1">
+                <a:solidFill>
+                  <a:srgbClr val="8B5CF6"/>
+                </a:solidFill>
+              </a:defRPr>
+            </a:pPr>
+            <a:r>
+              <a:t>시간 · 날씨 적응</a:t>
+            </a:r>
+          </a:p>
+          <a:p>
+            <a:pPr algn="ctr">
+              <a:spcAft>
+                <a:spcPts val="400"/>
+              </a:spcAft>
+              <a:defRPr sz="1200">
+                <a:solidFill>
+                  <a:srgbClr val="374151"/>
+                </a:solidFill>
+              </a:defRPr>
+            </a:pPr>
+            <a:r>
+              <a:t>5 시간대 곱셈 테이블</a:t>
+            </a:r>
+          </a:p>
+          <a:p>
+            <a:pPr algn="ctr">
+              <a:spcAft>
+                <a:spcPts val="400"/>
+              </a:spcAft>
+              <a:defRPr sz="1200">
+                <a:solidFill>
+                  <a:srgbClr val="374151"/>
+                </a:solidFill>
+              </a:defRPr>
+            </a:pPr>
+            <a:r>
+              <a:t>동 character cat_boost</a:t>
+            </a:r>
+          </a:p>
+        </p:txBody>
+      </p:sp>
+      <p:sp>
+        <p:nvSpPr>
+          <p:cNvPr id="13" name="Oval 12"/>
+          <p:cNvSpPr/>
+          <p:nvPr/>
+        </p:nvSpPr>
+        <p:spPr>
+          <a:xfrm>
+            <a:off x="10332719" y="1691640"/>
+            <a:ext cx="1005840" cy="1005840"/>
+          </a:xfrm>
+          <a:prstGeom prst="ellipse">
+            <a:avLst/>
+          </a:prstGeom>
+          <a:solidFill>
+            <a:srgbClr val="EC4899"/>
+          </a:solidFill>
+          <a:ln>
+            <a:noFill/>
+          </a:ln>
+        </p:spPr>
+        <p:style>
+          <a:lnRef idx="1">
+            <a:schemeClr val="accent1"/>
+          </a:lnRef>
+          <a:fillRef idx="3">
+            <a:schemeClr val="accent1"/>
+          </a:fillRef>
+          <a:effectRef idx="2">
+            <a:schemeClr val="accent1"/>
+          </a:effectRef>
+          <a:fontRef idx="minor">
+            <a:schemeClr val="lt1"/>
+          </a:fontRef>
+        </p:style>
+        <p:txBody>
+          <a:bodyPr rtlCol="0" anchor="ctr" lIns="0" tIns="0" bIns="0" rIns="0"/>
+          <a:lstStyle/>
+          <a:p>
+            <a:pPr algn="ctr">
+              <a:defRPr sz="2800" b="1">
+                <a:solidFill>
+                  <a:srgbClr val="FFFFFF"/>
+                </a:solidFill>
+              </a:defRPr>
+            </a:pPr>
+            <a:r>
+              <a:t>L5</a:t>
+            </a:r>
+          </a:p>
+        </p:txBody>
+      </p:sp>
+      <p:sp>
+        <p:nvSpPr>
+          <p:cNvPr id="14" name="Rounded Rectangle 13"/>
+          <p:cNvSpPr/>
+          <p:nvPr/>
+        </p:nvSpPr>
+        <p:spPr>
+          <a:xfrm>
+            <a:off x="9692640" y="2880360"/>
+            <a:ext cx="2286000" cy="3291840"/>
+          </a:xfrm>
+          <a:prstGeom prst="roundRect">
+            <a:avLst/>
+          </a:prstGeom>
+          <a:solidFill>
+            <a:srgbClr val="FFFFFF"/>
+          </a:solidFill>
+          <a:ln w="25400">
+            <a:solidFill>
+              <a:srgbClr val="EC4899"/>
+            </a:solidFill>
+          </a:ln>
+        </p:spPr>
+        <p:style>
+          <a:lnRef idx="1">
+            <a:schemeClr val="accent1"/>
+          </a:lnRef>
+          <a:fillRef idx="3">
+            <a:schemeClr val="accent1"/>
+          </a:fillRef>
+          <a:effectRef idx="2">
+            <a:schemeClr val="accent1"/>
+          </a:effectRef>
+          <a:fontRef idx="minor">
+            <a:schemeClr val="lt1"/>
+          </a:fontRef>
+        </p:style>
+        <p:txBody>
+          <a:bodyPr rtlCol="0" anchor="ctr" wrap="square" lIns="182880" tIns="228600"/>
+          <a:lstStyle/>
+          <a:p>
+            <a:pPr algn="ctr">
+              <a:spcAft>
+                <a:spcPts val="1500"/>
+              </a:spcAft>
+              <a:defRPr sz="2000" b="1">
+                <a:solidFill>
+                  <a:srgbClr val="EC4899"/>
+                </a:solidFill>
+              </a:defRPr>
+            </a:pPr>
+            <a:r>
+              <a:t>소셜</a:t>
+            </a:r>
+          </a:p>
+          <a:p>
+            <a:pPr algn="ctr">
+              <a:spcAft>
+                <a:spcPts val="400"/>
+              </a:spcAft>
+              <a:defRPr sz="1200">
+                <a:solidFill>
+                  <a:srgbClr val="374151"/>
+                </a:solidFill>
+              </a:defRPr>
+            </a:pPr>
+            <a:r>
+              <a:t>Dunbar k=5 친구</a:t>
+            </a:r>
+          </a:p>
+          <a:p>
+            <a:pPr algn="ctr">
+              <a:spcAft>
+                <a:spcPts val="400"/>
+              </a:spcAft>
+              <a:defRPr sz="1200">
+                <a:solidFill>
+                  <a:srgbClr val="374151"/>
+                </a:solidFill>
+              </a:defRPr>
+            </a:pPr>
+            <a:r>
+              <a:t>만족도 &gt; 0.7 → 추천 전파</a:t>
+            </a:r>
+          </a:p>
+        </p:txBody>
+      </p:sp>
+      <p:sp>
+        <p:nvSpPr>
+          <p:cNvPr id="15" name="TextBox 14"/>
           <p:cNvSpPr txBox="1"/>
           <p:nvPr/>
         </p:nvSpPr>
         <p:spPr>
           <a:xfrm>
-            <a:off x="914400" y="4114800"/>
-            <a:ext cx="10332720" cy="4572000"/>
+            <a:off x="457200" y="6263640"/>
+            <a:ext cx="11247120" cy="365760"/>
           </a:xfrm>
           <a:prstGeom prst="rect">
             <a:avLst/>
@@ -4934,68 +6203,20 @@
           <a:noFill/>
         </p:spPr>
         <p:txBody>
-          <a:bodyPr wrap="square">
+          <a:bodyPr wrap="none">
             <a:spAutoFit/>
           </a:bodyPr>
           <a:lstStyle/>
           <a:p>
-            <a:pPr>
-              <a:spcAft>
-                <a:spcPts val="1800"/>
-              </a:spcAft>
-              <a:defRPr sz="2000">
-                <a:solidFill>
-                  <a:srgbClr val="374151"/>
-                </a:solidFill>
-              </a:defRPr>
-            </a:pPr>
-            <a:r>
-              <a:t>_TIME_BLOCK_DELTAS — morning/lunch/afternoon/evening/night 곱셈</a:t>
-            </a:r>
-          </a:p>
-          <a:p>
-            <a:pPr>
-              <a:spcAft>
-                <a:spcPts val="1800"/>
-              </a:spcAft>
-              <a:defRPr sz="2000">
-                <a:solidFill>
-                  <a:srgbClr val="374151"/>
-                </a:solidFill>
-              </a:defRPr>
-            </a:pPr>
-            <a:r>
-              <a:t>_ROLE_TIME_OVERRIDES — ext_visitor evening pub ×1.7 등</a:t>
-            </a:r>
-          </a:p>
-          <a:p>
-            <a:pPr>
-              <a:spcAft>
-                <a:spcPts val="1800"/>
-              </a:spcAft>
-              <a:defRPr sz="2000">
-                <a:solidFill>
-                  <a:srgbClr val="374151"/>
-                </a:solidFill>
-              </a:defRPr>
-            </a:pPr>
-            <a:r>
-              <a:t>Archetype: homebody / night_owl / trendy_local / fitness ...</a:t>
-            </a:r>
-          </a:p>
-          <a:p>
-            <a:pPr>
-              <a:spcAft>
-                <a:spcPts val="1800"/>
-              </a:spcAft>
-              <a:defRPr sz="2000">
-                <a:solidFill>
-                  <a:srgbClr val="374151"/>
-                </a:solidFill>
-              </a:defRPr>
-            </a:pPr>
-            <a:r>
-              <a:t>1000명 × 66 정책 × ±15% = 사실상 1000 고유 행동</a:t>
+            <a:pPr algn="l">
+              <a:defRPr sz="1300" i="1">
+                <a:solidFill>
+                  <a:srgbClr val="6B7280"/>
+                </a:solidFill>
+              </a:defRPr>
+            </a:pPr>
+            <a:r>
+              <a:t>agents.py · 정책만 있으면 똑같이 행동 → 5 Layer 더해서 사람마다 달라진다</a:t>
             </a:r>
           </a:p>
         </p:txBody>
@@ -5020,16 +6241,16 @@
       <p:grpSpPr/>
       <p:sp>
         <p:nvSpPr>
-          <p:cNvPr id="2" name="Oval 1"/>
+          <p:cNvPr id="2" name="Rounded Rectangle 1"/>
           <p:cNvSpPr/>
           <p:nvPr/>
         </p:nvSpPr>
         <p:spPr>
           <a:xfrm>
-            <a:off x="548640" y="457200"/>
-            <a:ext cx="640080" cy="640080"/>
-          </a:xfrm>
-          <a:prstGeom prst="ellipse">
+            <a:off x="457200" y="457200"/>
+            <a:ext cx="868680" cy="640080"/>
+          </a:xfrm>
+          <a:prstGeom prst="roundRect">
             <a:avLst/>
           </a:prstGeom>
           <a:solidFill>
@@ -5065,7 +6286,7 @@
               </a:defRPr>
             </a:pPr>
             <a:r>
-              <a:t>5</a:t>
+              <a:t>20</a:t>
             </a:r>
           </a:p>
         </p:txBody>
@@ -5078,7 +6299,7 @@
         </p:nvSpPr>
         <p:spPr>
           <a:xfrm>
-            <a:off x="1371600" y="457200"/>
+            <a:off x="1508760" y="411480"/>
             <a:ext cx="10058400" cy="640080"/>
           </a:xfrm>
           <a:prstGeom prst="rect">
@@ -5093,14 +6314,14 @@
           <a:lstStyle/>
           <a:p>
             <a:pPr>
-              <a:defRPr sz="3200" b="1">
+              <a:defRPr sz="2800" b="1">
                 <a:solidFill>
                   <a:srgbClr val="1F2D4E"/>
                 </a:solidFill>
               </a:defRPr>
             </a:pPr>
             <a:r>
-              <a:t>Layer 3 — Tier 라우팅</a:t>
+              <a:t>신규 진입은 시장을 키우는가, 빼앗는가</a:t>
             </a:r>
           </a:p>
         </p:txBody>
@@ -5113,7 +6334,7 @@
         </p:nvSpPr>
         <p:spPr>
           <a:xfrm>
-            <a:off x="548640" y="1234440"/>
+            <a:off x="457200" y="1417320"/>
             <a:ext cx="1371600" cy="45720"/>
           </a:xfrm>
           <a:prstGeom prst="rect">
@@ -5156,19 +6377,17 @@
         </p:nvSpPr>
         <p:spPr>
           <a:xfrm>
-            <a:off x="914400" y="1828800"/>
-            <a:ext cx="3383280" cy="3840480"/>
+            <a:off x="457200" y="1691640"/>
+            <a:ext cx="11247120" cy="1280160"/>
           </a:xfrm>
           <a:prstGeom prst="roundRect">
             <a:avLst/>
           </a:prstGeom>
           <a:solidFill>
-            <a:srgbClr val="F3F4F6"/>
-          </a:solidFill>
-          <a:ln w="38100">
-            <a:solidFill>
-              <a:srgbClr val="8B5CF6"/>
-            </a:solidFill>
+            <a:srgbClr val="1F2D4E"/>
+          </a:solidFill>
+          <a:ln>
+            <a:noFill/>
           </a:ln>
         </p:spPr>
         <p:style>
@@ -5186,67 +6405,33 @@
           </a:fontRef>
         </p:style>
         <p:txBody>
-          <a:bodyPr rtlCol="0" anchor="ctr" wrap="square" tIns="274320"/>
+          <a:bodyPr rtlCol="0" anchor="ctr" wrap="square" lIns="274320" tIns="137160"/>
           <a:lstStyle/>
           <a:p>
             <a:pPr algn="ctr">
-              <a:defRPr sz="2800" b="1">
-                <a:solidFill>
-                  <a:srgbClr val="8B5CF6"/>
-                </a:solidFill>
-              </a:defRPr>
-            </a:pPr>
-            <a:r>
-              <a:t>Tier S</a:t>
-            </a:r>
-          </a:p>
-          <a:p>
-            <a:pPr algn="ctr">
+              <a:defRPr sz="1500" b="1">
+                <a:solidFill>
+                  <a:srgbClr val="3B82F6"/>
+                </a:solidFill>
+              </a:defRPr>
+            </a:pPr>
+            <a:r>
+              <a:t>측정 방법 — 같은 seed, 두 번 시뮬</a:t>
+            </a:r>
+          </a:p>
+          <a:p>
+            <a:pPr>
               <a:spcBef>
                 <a:spcPts val="800"/>
               </a:spcBef>
-              <a:defRPr sz="3600" b="1">
-                <a:solidFill>
-                  <a:srgbClr val="1F2D4E"/>
-                </a:solidFill>
-              </a:defRPr>
-            </a:pPr>
-            <a:r>
-              <a:t>50명</a:t>
-            </a:r>
-          </a:p>
-          <a:p>
-            <a:pPr algn="ctr">
-              <a:spcBef>
-                <a:spcPts val="2000"/>
-              </a:spcBef>
               <a:defRPr sz="1500">
                 <a:solidFill>
-                  <a:srgbClr val="374151"/>
-                </a:solidFill>
-              </a:defRPr>
-            </a:pPr>
-            <a:r>
-              <a:t>Haiku 4.5</a:t>
-            </a:r>
-            <a:br/>
-            <a:r>
-              <a:t>+ ephemeral cache</a:t>
-            </a:r>
-          </a:p>
-          <a:p>
-            <a:pPr algn="ctr">
-              <a:spcBef>
-                <a:spcPts val="800"/>
-              </a:spcBef>
-              <a:defRPr sz="1300" i="1">
-                <a:solidFill>
-                  <a:srgbClr val="6B7280"/>
-                </a:solidFill>
-              </a:defRPr>
-            </a:pPr>
-            <a:r>
-              <a:t>풀 LLM + 서사</a:t>
+                  <a:srgbClr val="FFFFFF"/>
+                </a:solidFill>
+              </a:defRPr>
+            </a:pPr>
+            <a:r>
+              <a:t>  baseline (vacancy 없이)   vs   with_vacancy   →   동 카페 합계 차이 = 카니발 / 시너지</a:t>
             </a:r>
           </a:p>
         </p:txBody>
@@ -5259,8 +6444,8 @@
         </p:nvSpPr>
         <p:spPr>
           <a:xfrm>
-            <a:off x="4709160" y="1828800"/>
-            <a:ext cx="3383280" cy="3840480"/>
+            <a:off x="914400" y="3246120"/>
+            <a:ext cx="5029200" cy="1828800"/>
           </a:xfrm>
           <a:prstGeom prst="roundRect">
             <a:avLst/>
@@ -5268,9 +6453,9 @@
           <a:solidFill>
             <a:srgbClr val="F3F4F6"/>
           </a:solidFill>
-          <a:ln w="38100">
+          <a:ln w="31750">
             <a:solidFill>
-              <a:srgbClr val="10B981"/>
+              <a:srgbClr val="3B82F6"/>
             </a:solidFill>
           </a:ln>
         </p:spPr>
@@ -5289,67 +6474,30 @@
           </a:fontRef>
         </p:style>
         <p:txBody>
-          <a:bodyPr rtlCol="0" anchor="ctr" wrap="square" tIns="274320"/>
+          <a:bodyPr rtlCol="0" anchor="ctr" wrap="square" tIns="182880"/>
           <a:lstStyle/>
           <a:p>
             <a:pPr algn="ctr">
-              <a:defRPr sz="2800" b="1">
-                <a:solidFill>
-                  <a:srgbClr val="10B981"/>
-                </a:solidFill>
-              </a:defRPr>
-            </a:pPr>
-            <a:r>
-              <a:t>Tier A</a:t>
+              <a:defRPr sz="3800" b="1">
+                <a:solidFill>
+                  <a:srgbClr val="3B82F6"/>
+                </a:solidFill>
+              </a:defRPr>
+            </a:pPr>
+            <a:r>
+              <a:t>+1.4 ± 3.5%</a:t>
             </a:r>
           </a:p>
           <a:p>
             <a:pPr algn="ctr">
-              <a:spcBef>
-                <a:spcPts val="800"/>
-              </a:spcBef>
-              <a:defRPr sz="3600" b="1">
-                <a:solidFill>
-                  <a:srgbClr val="1F2D4E"/>
-                </a:solidFill>
-              </a:defRPr>
-            </a:pPr>
-            <a:r>
-              <a:t>200명</a:t>
-            </a:r>
-          </a:p>
-          <a:p>
-            <a:pPr algn="ctr">
-              <a:spcBef>
-                <a:spcPts val="2000"/>
-              </a:spcBef>
-              <a:defRPr sz="1500">
+              <a:defRPr sz="1400">
                 <a:solidFill>
                   <a:srgbClr val="374151"/>
                 </a:solidFill>
               </a:defRPr>
             </a:pPr>
             <a:r>
-              <a:t>Gemini 2.5</a:t>
-            </a:r>
-            <a:br/>
-            <a:r>
-              <a:t>Flash-Lite</a:t>
-            </a:r>
-          </a:p>
-          <a:p>
-            <a:pPr algn="ctr">
-              <a:spcBef>
-                <a:spcPts val="800"/>
-              </a:spcBef>
-              <a:defRPr sz="1300" i="1">
-                <a:solidFill>
-                  <a:srgbClr val="6B7280"/>
-                </a:solidFill>
-              </a:defRPr>
-            </a:pPr>
-            <a:r>
-              <a:t>경량 LLM</a:t>
+              <a:t>동 카페 시장 성장률 (95% CI)</a:t>
             </a:r>
           </a:p>
         </p:txBody>
@@ -5362,8 +6510,8 @@
         </p:nvSpPr>
         <p:spPr>
           <a:xfrm>
-            <a:off x="8503920" y="1828800"/>
-            <a:ext cx="3383280" cy="3840480"/>
+            <a:off x="6263640" y="3246120"/>
+            <a:ext cx="5029200" cy="1828800"/>
           </a:xfrm>
           <a:prstGeom prst="roundRect">
             <a:avLst/>
@@ -5371,9 +6519,9 @@
           <a:solidFill>
             <a:srgbClr val="F3F4F6"/>
           </a:solidFill>
-          <a:ln w="38100">
+          <a:ln w="31750">
             <a:solidFill>
-              <a:srgbClr val="F59E0B"/>
+              <a:srgbClr val="EF4444"/>
             </a:solidFill>
           </a:ln>
         </p:spPr>
@@ -5392,143 +6540,55 @@
           </a:fontRef>
         </p:style>
         <p:txBody>
-          <a:bodyPr rtlCol="0" anchor="ctr" wrap="square" tIns="274320"/>
+          <a:bodyPr rtlCol="0" anchor="ctr" wrap="square" tIns="182880"/>
           <a:lstStyle/>
           <a:p>
             <a:pPr algn="ctr">
-              <a:defRPr sz="2800" b="1">
-                <a:solidFill>
-                  <a:srgbClr val="F59E0B"/>
-                </a:solidFill>
-              </a:defRPr>
-            </a:pPr>
-            <a:r>
-              <a:t>Tier B</a:t>
+              <a:defRPr sz="3200" b="1">
+                <a:solidFill>
+                  <a:srgbClr val="EF4444"/>
+                </a:solidFill>
+              </a:defRPr>
+            </a:pPr>
+            <a:r>
+              <a:t>CI 0 포함</a:t>
             </a:r>
           </a:p>
           <a:p>
             <a:pPr algn="ctr">
-              <a:spcBef>
-                <a:spcPts val="800"/>
-              </a:spcBef>
-              <a:defRPr sz="3600" b="1">
-                <a:solidFill>
-                  <a:srgbClr val="1F2D4E"/>
-                </a:solidFill>
-              </a:defRPr>
-            </a:pPr>
-            <a:r>
-              <a:t>750명</a:t>
-            </a:r>
-          </a:p>
-          <a:p>
-            <a:pPr algn="ctr">
-              <a:spcBef>
-                <a:spcPts val="2000"/>
-              </a:spcBef>
-              <a:defRPr sz="1500">
+              <a:defRPr sz="1400">
                 <a:solidFill>
                   <a:srgbClr val="374151"/>
                 </a:solidFill>
               </a:defRPr>
             </a:pPr>
             <a:r>
-              <a:t>policy_executor</a:t>
-            </a:r>
-            <a:br/>
-            <a:r>
-              <a:t>순수 Python</a:t>
-            </a:r>
-          </a:p>
-          <a:p>
-            <a:pPr algn="ctr">
-              <a:spcBef>
-                <a:spcPts val="800"/>
-              </a:spcBef>
-              <a:defRPr sz="1300" i="1">
-                <a:solidFill>
-                  <a:srgbClr val="6B7280"/>
-                </a:solidFill>
-              </a:defRPr>
-            </a:pPr>
-            <a:r>
-              <a:t>결정적 함수</a:t>
-            </a:r>
-          </a:p>
-        </p:txBody>
-      </p:sp>
-      <p:sp>
-        <p:nvSpPr>
-          <p:cNvPr id="8" name="TextBox 7"/>
-          <p:cNvSpPr txBox="1"/>
+              <a:t>통계적으로 시장 확장 없음</a:t>
+            </a:r>
+          </a:p>
+        </p:txBody>
+      </p:sp>
+      <p:sp>
+        <p:nvSpPr>
+          <p:cNvPr id="8" name="Rounded Rectangle 7"/>
+          <p:cNvSpPr/>
           <p:nvPr/>
         </p:nvSpPr>
         <p:spPr>
           <a:xfrm>
-            <a:off x="914400" y="5852160"/>
-            <a:ext cx="10332720" cy="548640"/>
-          </a:xfrm>
-          <a:prstGeom prst="rect">
+            <a:off x="457200" y="5349240"/>
+            <a:ext cx="11247120" cy="1280160"/>
+          </a:xfrm>
+          <a:prstGeom prst="roundRect">
             <a:avLst/>
           </a:prstGeom>
-          <a:noFill/>
-        </p:spPr>
-        <p:txBody>
-          <a:bodyPr wrap="none">
-            <a:spAutoFit/>
-          </a:bodyPr>
-          <a:lstStyle/>
-          <a:p>
-            <a:pPr algn="l">
-              <a:defRPr sz="1600" i="1">
-                <a:solidFill>
-                  <a:srgbClr val="6B7280"/>
-                </a:solidFill>
-              </a:defRPr>
-            </a:pPr>
-            <a:r>
-              <a:t>Auto-downgrade: anthropic → openai → ollama → mock</a:t>
-            </a:r>
-          </a:p>
-        </p:txBody>
-      </p:sp>
-    </p:spTree>
-  </p:cSld>
-  <p:clrMapOvr>
-    <a:masterClrMapping/>
-  </p:clrMapOvr>
-</p:sld>
-</file>
-
-<file path=ppt/slides/slide6.xml><?xml version="1.0" encoding="utf-8"?>
-<p:sld xmlns:a="http://schemas.openxmlformats.org/drawingml/2006/main" xmlns:p="http://schemas.openxmlformats.org/presentationml/2006/main" xmlns:r="http://schemas.openxmlformats.org/officeDocument/2006/relationships">
-  <p:cSld>
-    <p:spTree>
-      <p:nvGrpSpPr>
-        <p:cNvPr id="1" name=""/>
-        <p:cNvGrpSpPr/>
-        <p:nvPr/>
-      </p:nvGrpSpPr>
-      <p:grpSpPr/>
-      <p:sp>
-        <p:nvSpPr>
-          <p:cNvPr id="2" name="Oval 1"/>
-          <p:cNvSpPr/>
-          <p:nvPr/>
-        </p:nvSpPr>
-        <p:spPr>
-          <a:xfrm>
-            <a:off x="548640" y="457200"/>
-            <a:ext cx="640080" cy="640080"/>
-          </a:xfrm>
-          <a:prstGeom prst="ellipse">
-            <a:avLst/>
-          </a:prstGeom>
-          <a:solidFill>
-            <a:srgbClr val="3B82F6"/>
-          </a:solidFill>
-          <a:ln>
-            <a:noFill/>
+          <a:solidFill>
+            <a:srgbClr val="DCFCE7"/>
+          </a:solidFill>
+          <a:ln w="31750">
+            <a:solidFill>
+              <a:srgbClr val="10B981"/>
+            </a:solidFill>
           </a:ln>
         </p:spPr>
         <p:style>
@@ -5546,2218 +6606,33 @@
           </a:fontRef>
         </p:style>
         <p:txBody>
-          <a:bodyPr rtlCol="0" anchor="ctr" lIns="0" rIns="0" tIns="0" bIns="0"/>
+          <a:bodyPr rtlCol="0" anchor="ctr" wrap="square" lIns="274320" tIns="182880"/>
           <a:lstStyle/>
           <a:p>
             <a:pPr algn="ctr">
-              <a:defRPr sz="2200" b="1">
-                <a:solidFill>
-                  <a:srgbClr val="FFFFFF"/>
-                </a:solidFill>
-              </a:defRPr>
-            </a:pPr>
-            <a:r>
-              <a:t>6</a:t>
-            </a:r>
-          </a:p>
-        </p:txBody>
-      </p:sp>
-      <p:sp>
-        <p:nvSpPr>
-          <p:cNvPr id="3" name="TextBox 2"/>
-          <p:cNvSpPr txBox="1"/>
-          <p:nvPr/>
-        </p:nvSpPr>
-        <p:spPr>
-          <a:xfrm>
-            <a:off x="1371600" y="457200"/>
-            <a:ext cx="10058400" cy="640080"/>
-          </a:xfrm>
-          <a:prstGeom prst="rect">
-            <a:avLst/>
-          </a:prstGeom>
-          <a:noFill/>
-        </p:spPr>
-        <p:txBody>
-          <a:bodyPr wrap="none">
-            <a:spAutoFit/>
-          </a:bodyPr>
-          <a:lstStyle/>
+              <a:defRPr sz="1800" b="1">
+                <a:solidFill>
+                  <a:srgbClr val="10B981"/>
+                </a:solidFill>
+              </a:defRPr>
+            </a:pPr>
+            <a:r>
+              <a:t>발견 — zero-sum 구조</a:t>
+            </a:r>
+          </a:p>
           <a:p>
             <a:pPr>
-              <a:defRPr sz="3200" b="1">
-                <a:solidFill>
-                  <a:srgbClr val="1F2D4E"/>
-                </a:solidFill>
-              </a:defRPr>
-            </a:pPr>
-            <a:r>
-              <a:t>기억 · 상태 · 소셜</a:t>
-            </a:r>
-          </a:p>
-        </p:txBody>
-      </p:sp>
-      <p:sp>
-        <p:nvSpPr>
-          <p:cNvPr id="4" name="Rectangle 3"/>
-          <p:cNvSpPr/>
-          <p:nvPr/>
-        </p:nvSpPr>
-        <p:spPr>
-          <a:xfrm>
-            <a:off x="548640" y="1234440"/>
-            <a:ext cx="1371600" cy="45720"/>
-          </a:xfrm>
-          <a:prstGeom prst="rect">
-            <a:avLst/>
-          </a:prstGeom>
-          <a:solidFill>
-            <a:srgbClr val="3B82F6"/>
-          </a:solidFill>
-          <a:ln>
-            <a:noFill/>
-          </a:ln>
-        </p:spPr>
-        <p:style>
-          <a:lnRef idx="1">
-            <a:schemeClr val="accent1"/>
-          </a:lnRef>
-          <a:fillRef idx="3">
-            <a:schemeClr val="accent1"/>
-          </a:fillRef>
-          <a:effectRef idx="2">
-            <a:schemeClr val="accent1"/>
-          </a:effectRef>
-          <a:fontRef idx="minor">
-            <a:schemeClr val="lt1"/>
-          </a:fontRef>
-        </p:style>
-        <p:txBody>
-          <a:bodyPr rtlCol="0" anchor="ctr"/>
-          <a:lstStyle/>
-          <a:p>
-            <a:pPr algn="ctr"/>
-          </a:p>
-        </p:txBody>
-      </p:sp>
-      <p:sp>
-        <p:nvSpPr>
-          <p:cNvPr id="5" name="Rounded Rectangle 4"/>
-          <p:cNvSpPr/>
-          <p:nvPr/>
-        </p:nvSpPr>
-        <p:spPr>
-          <a:xfrm>
-            <a:off x="914400" y="1828800"/>
-            <a:ext cx="3383280" cy="3200400"/>
-          </a:xfrm>
-          <a:prstGeom prst="roundRect">
-            <a:avLst/>
-          </a:prstGeom>
-          <a:solidFill>
-            <a:srgbClr val="FFFFFF"/>
-          </a:solidFill>
-          <a:ln w="31750">
-            <a:solidFill>
-              <a:srgbClr val="3B82F6"/>
-            </a:solidFill>
-          </a:ln>
-        </p:spPr>
-        <p:style>
-          <a:lnRef idx="1">
-            <a:schemeClr val="accent1"/>
-          </a:lnRef>
-          <a:fillRef idx="3">
-            <a:schemeClr val="accent1"/>
-          </a:fillRef>
-          <a:effectRef idx="2">
-            <a:schemeClr val="accent1"/>
-          </a:effectRef>
-          <a:fontRef idx="minor">
-            <a:schemeClr val="lt1"/>
-          </a:fontRef>
-        </p:style>
-        <p:txBody>
-          <a:bodyPr rtlCol="0" anchor="ctr" wrap="square" lIns="274320" tIns="274320"/>
-          <a:lstStyle/>
-          <a:p>
-            <a:pPr algn="ctr">
-              <a:defRPr sz="1300" b="1">
-                <a:solidFill>
-                  <a:srgbClr val="3B82F6"/>
-                </a:solidFill>
-              </a:defRPr>
-            </a:pPr>
-            <a:r>
-              <a:t>Layer 2</a:t>
-            </a:r>
-          </a:p>
-          <a:p>
-            <a:pPr>
-              <a:spcAft>
-                <a:spcPts val="1500"/>
-              </a:spcAft>
-              <a:defRPr sz="2600" b="1">
-                <a:solidFill>
-                  <a:srgbClr val="1F2D4E"/>
-                </a:solidFill>
-              </a:defRPr>
-            </a:pPr>
-            <a:r>
-              <a:t>기억</a:t>
-            </a:r>
-          </a:p>
-          <a:p>
-            <a:pPr>
-              <a:spcAft>
-                <a:spcPts val="600"/>
-              </a:spcAft>
-              <a:defRPr sz="1600">
+              <a:spcBef>
+                <a:spcPts val="800"/>
+              </a:spcBef>
+              <a:defRPr sz="1500">
                 <a:solidFill>
                   <a:srgbClr val="374151"/>
                 </a:solidFill>
               </a:defRPr>
             </a:pPr>
             <a:r>
-              <a:t>· visit_history</a:t>
-            </a:r>
-          </a:p>
-          <a:p>
-            <a:pPr>
-              <a:spcAft>
-                <a:spcPts val="600"/>
-              </a:spcAft>
-              <a:defRPr sz="1600">
-                <a:solidFill>
-                  <a:srgbClr val="374151"/>
-                </a:solidFill>
-              </a:defRPr>
-            </a:pPr>
-            <a:r>
-              <a:t>· learned_prefs</a:t>
-            </a:r>
-          </a:p>
-          <a:p>
-            <a:pPr>
-              <a:spcAft>
-                <a:spcPts val="600"/>
-              </a:spcAft>
-              <a:defRPr sz="1600">
-                <a:solidFill>
-                  <a:srgbClr val="374151"/>
-                </a:solidFill>
-              </a:defRPr>
-            </a:pPr>
-            <a:r>
-              <a:t>· blacklist</a:t>
-            </a:r>
-          </a:p>
-          <a:p>
-            <a:pPr>
-              <a:spcAft>
-                <a:spcPts val="600"/>
-              </a:spcAft>
-              <a:defRPr sz="1600">
-                <a:solidFill>
-                  <a:srgbClr val="374151"/>
-                </a:solidFill>
-              </a:defRPr>
-            </a:pPr>
-            <a:r>
-              <a:t>· habit_store</a:t>
-            </a:r>
-          </a:p>
-        </p:txBody>
-      </p:sp>
-      <p:sp>
-        <p:nvSpPr>
-          <p:cNvPr id="6" name="Rounded Rectangle 5"/>
-          <p:cNvSpPr/>
-          <p:nvPr/>
-        </p:nvSpPr>
-        <p:spPr>
-          <a:xfrm>
-            <a:off x="4709160" y="1828800"/>
-            <a:ext cx="3383280" cy="3200400"/>
-          </a:xfrm>
-          <a:prstGeom prst="roundRect">
-            <a:avLst/>
-          </a:prstGeom>
-          <a:solidFill>
-            <a:srgbClr val="FFFFFF"/>
-          </a:solidFill>
-          <a:ln w="31750">
-            <a:solidFill>
-              <a:srgbClr val="10B981"/>
-            </a:solidFill>
-          </a:ln>
-        </p:spPr>
-        <p:style>
-          <a:lnRef idx="1">
-            <a:schemeClr val="accent1"/>
-          </a:lnRef>
-          <a:fillRef idx="3">
-            <a:schemeClr val="accent1"/>
-          </a:fillRef>
-          <a:effectRef idx="2">
-            <a:schemeClr val="accent1"/>
-          </a:effectRef>
-          <a:fontRef idx="minor">
-            <a:schemeClr val="lt1"/>
-          </a:fontRef>
-        </p:style>
-        <p:txBody>
-          <a:bodyPr rtlCol="0" anchor="ctr" wrap="square" lIns="274320" tIns="274320"/>
-          <a:lstStyle/>
-          <a:p>
-            <a:pPr algn="ctr">
-              <a:defRPr sz="1300" b="1">
-                <a:solidFill>
-                  <a:srgbClr val="10B981"/>
-                </a:solidFill>
-              </a:defRPr>
-            </a:pPr>
-            <a:r>
-              <a:t>Layer 3</a:t>
-            </a:r>
-          </a:p>
-          <a:p>
-            <a:pPr>
-              <a:spcAft>
-                <a:spcPts val="1500"/>
-              </a:spcAft>
-              <a:defRPr sz="2600" b="1">
-                <a:solidFill>
-                  <a:srgbClr val="1F2D4E"/>
-                </a:solidFill>
-              </a:defRPr>
-            </a:pPr>
-            <a:r>
-              <a:t>상태</a:t>
-            </a:r>
-          </a:p>
-          <a:p>
-            <a:pPr>
-              <a:spcAft>
-                <a:spcPts val="600"/>
-              </a:spcAft>
-              <a:defRPr sz="1600">
-                <a:solidFill>
-                  <a:srgbClr val="374151"/>
-                </a:solidFill>
-              </a:defRPr>
-            </a:pPr>
-            <a:r>
-              <a:t>· hunger</a:t>
-            </a:r>
-          </a:p>
-          <a:p>
-            <a:pPr>
-              <a:spcAft>
-                <a:spcPts val="600"/>
-              </a:spcAft>
-              <a:defRPr sz="1600">
-                <a:solidFill>
-                  <a:srgbClr val="374151"/>
-                </a:solidFill>
-              </a:defRPr>
-            </a:pPr>
-            <a:r>
-              <a:t>· fatigue</a:t>
-            </a:r>
-          </a:p>
-          <a:p>
-            <a:pPr>
-              <a:spcAft>
-                <a:spcPts val="600"/>
-              </a:spcAft>
-              <a:defRPr sz="1600">
-                <a:solidFill>
-                  <a:srgbClr val="374151"/>
-                </a:solidFill>
-              </a:defRPr>
-            </a:pPr>
-            <a:r>
-              <a:t>· mood</a:t>
-            </a:r>
-          </a:p>
-          <a:p>
-            <a:pPr>
-              <a:spcAft>
-                <a:spcPts val="600"/>
-              </a:spcAft>
-              <a:defRPr sz="1600">
-                <a:solidFill>
-                  <a:srgbClr val="374151"/>
-                </a:solidFill>
-              </a:defRPr>
-            </a:pPr>
-            <a:r>
-              <a:t>· tick decay/recover</a:t>
-            </a:r>
-          </a:p>
-        </p:txBody>
-      </p:sp>
-      <p:sp>
-        <p:nvSpPr>
-          <p:cNvPr id="7" name="Rounded Rectangle 6"/>
-          <p:cNvSpPr/>
-          <p:nvPr/>
-        </p:nvSpPr>
-        <p:spPr>
-          <a:xfrm>
-            <a:off x="8503920" y="1828800"/>
-            <a:ext cx="3383280" cy="3200400"/>
-          </a:xfrm>
-          <a:prstGeom prst="roundRect">
-            <a:avLst/>
-          </a:prstGeom>
-          <a:solidFill>
-            <a:srgbClr val="FFFFFF"/>
-          </a:solidFill>
-          <a:ln w="31750">
-            <a:solidFill>
-              <a:srgbClr val="F59E0B"/>
-            </a:solidFill>
-          </a:ln>
-        </p:spPr>
-        <p:style>
-          <a:lnRef idx="1">
-            <a:schemeClr val="accent1"/>
-          </a:lnRef>
-          <a:fillRef idx="3">
-            <a:schemeClr val="accent1"/>
-          </a:fillRef>
-          <a:effectRef idx="2">
-            <a:schemeClr val="accent1"/>
-          </a:effectRef>
-          <a:fontRef idx="minor">
-            <a:schemeClr val="lt1"/>
-          </a:fontRef>
-        </p:style>
-        <p:txBody>
-          <a:bodyPr rtlCol="0" anchor="ctr" wrap="square" lIns="274320" tIns="274320"/>
-          <a:lstStyle/>
-          <a:p>
-            <a:pPr algn="ctr">
-              <a:defRPr sz="1300" b="1">
-                <a:solidFill>
-                  <a:srgbClr val="F59E0B"/>
-                </a:solidFill>
-              </a:defRPr>
-            </a:pPr>
-            <a:r>
-              <a:t>Layer 5</a:t>
-            </a:r>
-          </a:p>
-          <a:p>
-            <a:pPr>
-              <a:spcAft>
-                <a:spcPts val="1500"/>
-              </a:spcAft>
-              <a:defRPr sz="2600" b="1">
-                <a:solidFill>
-                  <a:srgbClr val="1F2D4E"/>
-                </a:solidFill>
-              </a:defRPr>
-            </a:pPr>
-            <a:r>
-              <a:t>소셜</a:t>
-            </a:r>
-          </a:p>
-          <a:p>
-            <a:pPr>
-              <a:spcAft>
-                <a:spcPts val="600"/>
-              </a:spcAft>
-              <a:defRPr sz="1600">
-                <a:solidFill>
-                  <a:srgbClr val="374151"/>
-                </a:solidFill>
-              </a:defRPr>
-            </a:pPr>
-            <a:r>
-              <a:t>· 만족도 &gt; 0.7</a:t>
-            </a:r>
-          </a:p>
-          <a:p>
-            <a:pPr>
-              <a:spcAft>
-                <a:spcPts val="600"/>
-              </a:spcAft>
-              <a:defRPr sz="1600">
-                <a:solidFill>
-                  <a:srgbClr val="374151"/>
-                </a:solidFill>
-              </a:defRPr>
-            </a:pPr>
-            <a:r>
-              <a:t>· 친구 2명 전파</a:t>
-            </a:r>
-          </a:p>
-          <a:p>
-            <a:pPr>
-              <a:spcAft>
-                <a:spcPts val="600"/>
-              </a:spcAft>
-              <a:defRPr sz="1600">
-                <a:solidFill>
-                  <a:srgbClr val="374151"/>
-                </a:solidFill>
-              </a:defRPr>
-            </a:pPr>
-            <a:r>
-              <a:t>· 다음 tick visit_p ↑</a:t>
-            </a:r>
-          </a:p>
-          <a:p>
-            <a:pPr>
-              <a:spcAft>
-                <a:spcPts val="600"/>
-              </a:spcAft>
-              <a:defRPr sz="1600">
-                <a:solidFill>
-                  <a:srgbClr val="374151"/>
-                </a:solidFill>
-              </a:defRPr>
-            </a:pPr>
-            <a:r>
-              <a:t>· 매장 평판 확산</a:t>
-            </a:r>
-          </a:p>
-        </p:txBody>
-      </p:sp>
-      <p:sp>
-        <p:nvSpPr>
-          <p:cNvPr id="8" name="Rounded Rectangle 7"/>
-          <p:cNvSpPr/>
-          <p:nvPr/>
-        </p:nvSpPr>
-        <p:spPr>
-          <a:xfrm>
-            <a:off x="914400" y="5303520"/>
-            <a:ext cx="10332720" cy="1097280"/>
-          </a:xfrm>
-          <a:prstGeom prst="roundRect">
-            <a:avLst/>
-          </a:prstGeom>
-          <a:solidFill>
-            <a:srgbClr val="F3F4F6"/>
-          </a:solidFill>
-          <a:ln>
-            <a:noFill/>
-          </a:ln>
-        </p:spPr>
-        <p:style>
-          <a:lnRef idx="1">
-            <a:schemeClr val="accent1"/>
-          </a:lnRef>
-          <a:fillRef idx="3">
-            <a:schemeClr val="accent1"/>
-          </a:fillRef>
-          <a:effectRef idx="2">
-            <a:schemeClr val="accent1"/>
-          </a:effectRef>
-          <a:fontRef idx="minor">
-            <a:schemeClr val="lt1"/>
-          </a:fontRef>
-        </p:style>
-        <p:txBody>
-          <a:bodyPr rtlCol="0" anchor="ctr" lIns="274320" tIns="182880"/>
-          <a:lstStyle/>
-          <a:p>
-            <a:pPr algn="ctr">
-              <a:defRPr sz="1500" b="1">
-                <a:solidFill>
-                  <a:srgbClr val="8B5CF6"/>
-                </a:solidFill>
-              </a:defRPr>
-            </a:pPr>
-            <a:r>
-              <a:t>Memory Seeder</a:t>
-            </a:r>
-          </a:p>
-          <a:p>
-            <a:pPr>
-              <a:defRPr sz="1800">
-                <a:solidFill>
-                  <a:srgbClr val="374151"/>
-                </a:solidFill>
-              </a:defRPr>
-            </a:pPr>
-            <a:r>
-              <a:t>14일 가상 visit 주입 → cold start 완화</a:t>
-            </a:r>
-          </a:p>
-        </p:txBody>
-      </p:sp>
-    </p:spTree>
-  </p:cSld>
-  <p:clrMapOvr>
-    <a:masterClrMapping/>
-  </p:clrMapOvr>
-</p:sld>
-</file>
-
-<file path=ppt/slides/slide7.xml><?xml version="1.0" encoding="utf-8"?>
-<p:sld xmlns:a="http://schemas.openxmlformats.org/drawingml/2006/main" xmlns:p="http://schemas.openxmlformats.org/presentationml/2006/main" xmlns:r="http://schemas.openxmlformats.org/officeDocument/2006/relationships">
-  <p:cSld>
-    <p:spTree>
-      <p:nvGrpSpPr>
-        <p:cNvPr id="1" name=""/>
-        <p:cNvGrpSpPr/>
-        <p:nvPr/>
-      </p:nvGrpSpPr>
-      <p:grpSpPr/>
-      <p:sp>
-        <p:nvSpPr>
-          <p:cNvPr id="2" name="Oval 1"/>
-          <p:cNvSpPr/>
-          <p:nvPr/>
-        </p:nvSpPr>
-        <p:spPr>
-          <a:xfrm>
-            <a:off x="548640" y="457200"/>
-            <a:ext cx="640080" cy="640080"/>
-          </a:xfrm>
-          <a:prstGeom prst="ellipse">
-            <a:avLst/>
-          </a:prstGeom>
-          <a:solidFill>
-            <a:srgbClr val="3B82F6"/>
-          </a:solidFill>
-          <a:ln>
-            <a:noFill/>
-          </a:ln>
-        </p:spPr>
-        <p:style>
-          <a:lnRef idx="1">
-            <a:schemeClr val="accent1"/>
-          </a:lnRef>
-          <a:fillRef idx="3">
-            <a:schemeClr val="accent1"/>
-          </a:fillRef>
-          <a:effectRef idx="2">
-            <a:schemeClr val="accent1"/>
-          </a:effectRef>
-          <a:fontRef idx="minor">
-            <a:schemeClr val="lt1"/>
-          </a:fontRef>
-        </p:style>
-        <p:txBody>
-          <a:bodyPr rtlCol="0" anchor="ctr" lIns="0" rIns="0" tIns="0" bIns="0"/>
-          <a:lstStyle/>
-          <a:p>
-            <a:pPr algn="ctr">
-              <a:defRPr sz="2200" b="1">
-                <a:solidFill>
-                  <a:srgbClr val="FFFFFF"/>
-                </a:solidFill>
-              </a:defRPr>
-            </a:pPr>
-            <a:r>
-              <a:t>7</a:t>
-            </a:r>
-          </a:p>
-        </p:txBody>
-      </p:sp>
-      <p:sp>
-        <p:nvSpPr>
-          <p:cNvPr id="3" name="TextBox 2"/>
-          <p:cNvSpPr txBox="1"/>
-          <p:nvPr/>
-        </p:nvSpPr>
-        <p:spPr>
-          <a:xfrm>
-            <a:off x="1371600" y="457200"/>
-            <a:ext cx="10058400" cy="640080"/>
-          </a:xfrm>
-          <a:prstGeom prst="rect">
-            <a:avLst/>
-          </a:prstGeom>
-          <a:noFill/>
-        </p:spPr>
-        <p:txBody>
-          <a:bodyPr wrap="none">
-            <a:spAutoFit/>
-          </a:bodyPr>
-          <a:lstStyle/>
-          <a:p>
-            <a:pPr>
-              <a:defRPr sz="3200" b="1">
-                <a:solidFill>
-                  <a:srgbClr val="1F2D4E"/>
-                </a:solidFill>
-              </a:defRPr>
-            </a:pPr>
-            <a:r>
-              <a:t>마포 16동 상권 DNA</a:t>
-            </a:r>
-          </a:p>
-        </p:txBody>
-      </p:sp>
-      <p:sp>
-        <p:nvSpPr>
-          <p:cNvPr id="4" name="Rectangle 3"/>
-          <p:cNvSpPr/>
-          <p:nvPr/>
-        </p:nvSpPr>
-        <p:spPr>
-          <a:xfrm>
-            <a:off x="548640" y="1234440"/>
-            <a:ext cx="1371600" cy="45720"/>
-          </a:xfrm>
-          <a:prstGeom prst="rect">
-            <a:avLst/>
-          </a:prstGeom>
-          <a:solidFill>
-            <a:srgbClr val="3B82F6"/>
-          </a:solidFill>
-          <a:ln>
-            <a:noFill/>
-          </a:ln>
-        </p:spPr>
-        <p:style>
-          <a:lnRef idx="1">
-            <a:schemeClr val="accent1"/>
-          </a:lnRef>
-          <a:fillRef idx="3">
-            <a:schemeClr val="accent1"/>
-          </a:fillRef>
-          <a:effectRef idx="2">
-            <a:schemeClr val="accent1"/>
-          </a:effectRef>
-          <a:fontRef idx="minor">
-            <a:schemeClr val="lt1"/>
-          </a:fontRef>
-        </p:style>
-        <p:txBody>
-          <a:bodyPr rtlCol="0" anchor="ctr"/>
-          <a:lstStyle/>
-          <a:p>
-            <a:pPr algn="ctr"/>
-          </a:p>
-        </p:txBody>
-      </p:sp>
-      <p:sp>
-        <p:nvSpPr>
-          <p:cNvPr id="5" name="Rounded Rectangle 4"/>
-          <p:cNvSpPr/>
-          <p:nvPr/>
-        </p:nvSpPr>
-        <p:spPr>
-          <a:xfrm>
-            <a:off x="914400" y="1828800"/>
-            <a:ext cx="2011680" cy="640080"/>
-          </a:xfrm>
-          <a:prstGeom prst="roundRect">
-            <a:avLst/>
-          </a:prstGeom>
-          <a:solidFill>
-            <a:srgbClr val="8B5CF6"/>
-          </a:solidFill>
-          <a:ln>
-            <a:noFill/>
-          </a:ln>
-        </p:spPr>
-        <p:style>
-          <a:lnRef idx="1">
-            <a:schemeClr val="accent1"/>
-          </a:lnRef>
-          <a:fillRef idx="3">
-            <a:schemeClr val="accent1"/>
-          </a:fillRef>
-          <a:effectRef idx="2">
-            <a:schemeClr val="accent1"/>
-          </a:effectRef>
-          <a:fontRef idx="minor">
-            <a:schemeClr val="lt1"/>
-          </a:fontRef>
-        </p:style>
-        <p:txBody>
-          <a:bodyPr rtlCol="0" anchor="ctr" tIns="91440"/>
-          <a:lstStyle/>
-          <a:p>
-            <a:pPr algn="ctr">
-              <a:defRPr sz="1600" b="1">
-                <a:solidFill>
-                  <a:srgbClr val="FFFFFF"/>
-                </a:solidFill>
-              </a:defRPr>
-            </a:pPr>
-            <a:r>
-              <a:t>nightlife</a:t>
-            </a:r>
-          </a:p>
-        </p:txBody>
-      </p:sp>
-      <p:sp>
-        <p:nvSpPr>
-          <p:cNvPr id="6" name="TextBox 5"/>
-          <p:cNvSpPr txBox="1"/>
-          <p:nvPr/>
-        </p:nvSpPr>
-        <p:spPr>
-          <a:xfrm>
-            <a:off x="3108960" y="1874519"/>
-            <a:ext cx="6400800" cy="548640"/>
-          </a:xfrm>
-          <a:prstGeom prst="rect">
-            <a:avLst/>
-          </a:prstGeom>
-          <a:noFill/>
-        </p:spPr>
-        <p:txBody>
-          <a:bodyPr wrap="none">
-            <a:spAutoFit/>
-          </a:bodyPr>
-          <a:lstStyle/>
-          <a:p>
-            <a:pPr>
-              <a:defRPr sz="1800">
-                <a:solidFill>
-                  <a:srgbClr val="374151"/>
-                </a:solidFill>
-              </a:defRPr>
-            </a:pPr>
-            <a:r>
-              <a:t>서교 · 합정 · 신수</a:t>
-            </a:r>
-          </a:p>
-        </p:txBody>
-      </p:sp>
-      <p:sp>
-        <p:nvSpPr>
-          <p:cNvPr id="7" name="TextBox 6"/>
-          <p:cNvSpPr txBox="1"/>
-          <p:nvPr/>
-        </p:nvSpPr>
-        <p:spPr>
-          <a:xfrm>
-            <a:off x="9601200" y="1874519"/>
-            <a:ext cx="2286000" cy="548640"/>
-          </a:xfrm>
-          <a:prstGeom prst="rect">
-            <a:avLst/>
-          </a:prstGeom>
-          <a:noFill/>
-        </p:spPr>
-        <p:txBody>
-          <a:bodyPr wrap="none">
-            <a:spAutoFit/>
-          </a:bodyPr>
-          <a:lstStyle/>
-          <a:p>
-            <a:pPr algn="ctr">
-              <a:defRPr sz="1600" b="1">
-                <a:solidFill>
-                  <a:srgbClr val="8B5CF6"/>
-                </a:solidFill>
-              </a:defRPr>
-            </a:pPr>
-            <a:r>
-              <a:t>주점 1.5</a:t>
-            </a:r>
-          </a:p>
-        </p:txBody>
-      </p:sp>
-      <p:sp>
-        <p:nvSpPr>
-          <p:cNvPr id="8" name="Rounded Rectangle 7"/>
-          <p:cNvSpPr/>
-          <p:nvPr/>
-        </p:nvSpPr>
-        <p:spPr>
-          <a:xfrm>
-            <a:off x="914400" y="2651760"/>
-            <a:ext cx="2011680" cy="640080"/>
-          </a:xfrm>
-          <a:prstGeom prst="roundRect">
-            <a:avLst/>
-          </a:prstGeom>
-          <a:solidFill>
-            <a:srgbClr val="EC4899"/>
-          </a:solidFill>
-          <a:ln>
-            <a:noFill/>
-          </a:ln>
-        </p:spPr>
-        <p:style>
-          <a:lnRef idx="1">
-            <a:schemeClr val="accent1"/>
-          </a:lnRef>
-          <a:fillRef idx="3">
-            <a:schemeClr val="accent1"/>
-          </a:fillRef>
-          <a:effectRef idx="2">
-            <a:schemeClr val="accent1"/>
-          </a:effectRef>
-          <a:fontRef idx="minor">
-            <a:schemeClr val="lt1"/>
-          </a:fontRef>
-        </p:style>
-        <p:txBody>
-          <a:bodyPr rtlCol="0" anchor="ctr" tIns="91440"/>
-          <a:lstStyle/>
-          <a:p>
-            <a:pPr algn="ctr">
-              <a:defRPr sz="1600" b="1">
-                <a:solidFill>
-                  <a:srgbClr val="FFFFFF"/>
-                </a:solidFill>
-              </a:defRPr>
-            </a:pPr>
-            <a:r>
-              <a:t>trendy</a:t>
-            </a:r>
-          </a:p>
-        </p:txBody>
-      </p:sp>
-      <p:sp>
-        <p:nvSpPr>
-          <p:cNvPr id="9" name="TextBox 8"/>
-          <p:cNvSpPr txBox="1"/>
-          <p:nvPr/>
-        </p:nvSpPr>
-        <p:spPr>
-          <a:xfrm>
-            <a:off x="3108960" y="2697479"/>
-            <a:ext cx="6400800" cy="548640"/>
-          </a:xfrm>
-          <a:prstGeom prst="rect">
-            <a:avLst/>
-          </a:prstGeom>
-          <a:noFill/>
-        </p:spPr>
-        <p:txBody>
-          <a:bodyPr wrap="none">
-            <a:spAutoFit/>
-          </a:bodyPr>
-          <a:lstStyle/>
-          <a:p>
-            <a:pPr>
-              <a:defRPr sz="1800">
-                <a:solidFill>
-                  <a:srgbClr val="374151"/>
-                </a:solidFill>
-              </a:defRPr>
-            </a:pPr>
-            <a:r>
-              <a:t>연남 · 망원1</a:t>
-            </a:r>
-          </a:p>
-        </p:txBody>
-      </p:sp>
-      <p:sp>
-        <p:nvSpPr>
-          <p:cNvPr id="10" name="TextBox 9"/>
-          <p:cNvSpPr txBox="1"/>
-          <p:nvPr/>
-        </p:nvSpPr>
-        <p:spPr>
-          <a:xfrm>
-            <a:off x="9601200" y="2697479"/>
-            <a:ext cx="2286000" cy="548640"/>
-          </a:xfrm>
-          <a:prstGeom prst="rect">
-            <a:avLst/>
-          </a:prstGeom>
-          <a:noFill/>
-        </p:spPr>
-        <p:txBody>
-          <a:bodyPr wrap="none">
-            <a:spAutoFit/>
-          </a:bodyPr>
-          <a:lstStyle/>
-          <a:p>
-            <a:pPr algn="ctr">
-              <a:defRPr sz="1600" b="1">
-                <a:solidFill>
-                  <a:srgbClr val="EC4899"/>
-                </a:solidFill>
-              </a:defRPr>
-            </a:pPr>
-            <a:r>
-              <a:t>카페 1.5</a:t>
-            </a:r>
-          </a:p>
-        </p:txBody>
-      </p:sp>
-      <p:sp>
-        <p:nvSpPr>
-          <p:cNvPr id="11" name="Rounded Rectangle 10"/>
-          <p:cNvSpPr/>
-          <p:nvPr/>
-        </p:nvSpPr>
-        <p:spPr>
-          <a:xfrm>
-            <a:off x="914400" y="3474720"/>
-            <a:ext cx="2011680" cy="640080"/>
-          </a:xfrm>
-          <a:prstGeom prst="roundRect">
-            <a:avLst/>
-          </a:prstGeom>
-          <a:solidFill>
-            <a:srgbClr val="3B82F6"/>
-          </a:solidFill>
-          <a:ln>
-            <a:noFill/>
-          </a:ln>
-        </p:spPr>
-        <p:style>
-          <a:lnRef idx="1">
-            <a:schemeClr val="accent1"/>
-          </a:lnRef>
-          <a:fillRef idx="3">
-            <a:schemeClr val="accent1"/>
-          </a:fillRef>
-          <a:effectRef idx="2">
-            <a:schemeClr val="accent1"/>
-          </a:effectRef>
-          <a:fontRef idx="minor">
-            <a:schemeClr val="lt1"/>
-          </a:fontRef>
-        </p:style>
-        <p:txBody>
-          <a:bodyPr rtlCol="0" anchor="ctr" tIns="91440"/>
-          <a:lstStyle/>
-          <a:p>
-            <a:pPr algn="ctr">
-              <a:defRPr sz="1600" b="1">
-                <a:solidFill>
-                  <a:srgbClr val="FFFFFF"/>
-                </a:solidFill>
-              </a:defRPr>
-            </a:pPr>
-            <a:r>
-              <a:t>office</a:t>
-            </a:r>
-          </a:p>
-        </p:txBody>
-      </p:sp>
-      <p:sp>
-        <p:nvSpPr>
-          <p:cNvPr id="12" name="TextBox 11"/>
-          <p:cNvSpPr txBox="1"/>
-          <p:nvPr/>
-        </p:nvSpPr>
-        <p:spPr>
-          <a:xfrm>
-            <a:off x="3108960" y="3520439"/>
-            <a:ext cx="6400800" cy="548640"/>
-          </a:xfrm>
-          <a:prstGeom prst="rect">
-            <a:avLst/>
-          </a:prstGeom>
-          <a:noFill/>
-        </p:spPr>
-        <p:txBody>
-          <a:bodyPr wrap="none">
-            <a:spAutoFit/>
-          </a:bodyPr>
-          <a:lstStyle/>
-          <a:p>
-            <a:pPr>
-              <a:defRPr sz="1800">
-                <a:solidFill>
-                  <a:srgbClr val="374151"/>
-                </a:solidFill>
-              </a:defRPr>
-            </a:pPr>
-            <a:r>
-              <a:t>상암 · 공덕 · 도화</a:t>
-            </a:r>
-          </a:p>
-        </p:txBody>
-      </p:sp>
-      <p:sp>
-        <p:nvSpPr>
-          <p:cNvPr id="13" name="TextBox 12"/>
-          <p:cNvSpPr txBox="1"/>
-          <p:nvPr/>
-        </p:nvSpPr>
-        <p:spPr>
-          <a:xfrm>
-            <a:off x="9601200" y="3520439"/>
-            <a:ext cx="2286000" cy="548640"/>
-          </a:xfrm>
-          <a:prstGeom prst="rect">
-            <a:avLst/>
-          </a:prstGeom>
-          <a:noFill/>
-        </p:spPr>
-        <p:txBody>
-          <a:bodyPr wrap="none">
-            <a:spAutoFit/>
-          </a:bodyPr>
-          <a:lstStyle/>
-          <a:p>
-            <a:pPr algn="ctr">
-              <a:defRPr sz="1600" b="1">
-                <a:solidFill>
-                  <a:srgbClr val="3B82F6"/>
-                </a:solidFill>
-              </a:defRPr>
-            </a:pPr>
-            <a:r>
-              <a:t>음식점 1.3</a:t>
-            </a:r>
-          </a:p>
-        </p:txBody>
-      </p:sp>
-      <p:sp>
-        <p:nvSpPr>
-          <p:cNvPr id="14" name="Rounded Rectangle 13"/>
-          <p:cNvSpPr/>
-          <p:nvPr/>
-        </p:nvSpPr>
-        <p:spPr>
-          <a:xfrm>
-            <a:off x="914400" y="4297680"/>
-            <a:ext cx="2011680" cy="640080"/>
-          </a:xfrm>
-          <a:prstGeom prst="roundRect">
-            <a:avLst/>
-          </a:prstGeom>
-          <a:solidFill>
-            <a:srgbClr val="10B981"/>
-          </a:solidFill>
-          <a:ln>
-            <a:noFill/>
-          </a:ln>
-        </p:spPr>
-        <p:style>
-          <a:lnRef idx="1">
-            <a:schemeClr val="accent1"/>
-          </a:lnRef>
-          <a:fillRef idx="3">
-            <a:schemeClr val="accent1"/>
-          </a:fillRef>
-          <a:effectRef idx="2">
-            <a:schemeClr val="accent1"/>
-          </a:effectRef>
-          <a:fontRef idx="minor">
-            <a:schemeClr val="lt1"/>
-          </a:fontRef>
-        </p:style>
-        <p:txBody>
-          <a:bodyPr rtlCol="0" anchor="ctr" tIns="91440"/>
-          <a:lstStyle/>
-          <a:p>
-            <a:pPr algn="ctr">
-              <a:defRPr sz="1600" b="1">
-                <a:solidFill>
-                  <a:srgbClr val="FFFFFF"/>
-                </a:solidFill>
-              </a:defRPr>
-            </a:pPr>
-            <a:r>
-              <a:t>residential</a:t>
-            </a:r>
-          </a:p>
-        </p:txBody>
-      </p:sp>
-      <p:sp>
-        <p:nvSpPr>
-          <p:cNvPr id="15" name="TextBox 14"/>
-          <p:cNvSpPr txBox="1"/>
-          <p:nvPr/>
-        </p:nvSpPr>
-        <p:spPr>
-          <a:xfrm>
-            <a:off x="3108960" y="4343400"/>
-            <a:ext cx="6400800" cy="548640"/>
-          </a:xfrm>
-          <a:prstGeom prst="rect">
-            <a:avLst/>
-          </a:prstGeom>
-          <a:noFill/>
-        </p:spPr>
-        <p:txBody>
-          <a:bodyPr wrap="none">
-            <a:spAutoFit/>
-          </a:bodyPr>
-          <a:lstStyle/>
-          <a:p>
-            <a:pPr>
-              <a:defRPr sz="1800">
-                <a:solidFill>
-                  <a:srgbClr val="374151"/>
-                </a:solidFill>
-              </a:defRPr>
-            </a:pPr>
-            <a:r>
-              <a:t>용강 · 아현 · 염리 · 대흥 · 서강 · 성산</a:t>
-            </a:r>
-          </a:p>
-        </p:txBody>
-      </p:sp>
-      <p:sp>
-        <p:nvSpPr>
-          <p:cNvPr id="16" name="TextBox 15"/>
-          <p:cNvSpPr txBox="1"/>
-          <p:nvPr/>
-        </p:nvSpPr>
-        <p:spPr>
-          <a:xfrm>
-            <a:off x="9601200" y="4343400"/>
-            <a:ext cx="2286000" cy="548640"/>
-          </a:xfrm>
-          <a:prstGeom prst="rect">
-            <a:avLst/>
-          </a:prstGeom>
-          <a:noFill/>
-        </p:spPr>
-        <p:txBody>
-          <a:bodyPr wrap="none">
-            <a:spAutoFit/>
-          </a:bodyPr>
-          <a:lstStyle/>
-          <a:p>
-            <a:pPr algn="ctr">
-              <a:defRPr sz="1600" b="1">
-                <a:solidFill>
-                  <a:srgbClr val="10B981"/>
-                </a:solidFill>
-              </a:defRPr>
-            </a:pPr>
-            <a:r>
-              <a:t>편의점 1.2</a:t>
-            </a:r>
-          </a:p>
-        </p:txBody>
-      </p:sp>
-      <p:sp>
-        <p:nvSpPr>
-          <p:cNvPr id="17" name="Rounded Rectangle 16"/>
-          <p:cNvSpPr/>
-          <p:nvPr/>
-        </p:nvSpPr>
-        <p:spPr>
-          <a:xfrm>
-            <a:off x="914400" y="5120640"/>
-            <a:ext cx="2011680" cy="640080"/>
-          </a:xfrm>
-          <a:prstGeom prst="roundRect">
-            <a:avLst/>
-          </a:prstGeom>
-          <a:solidFill>
-            <a:srgbClr val="F59E0B"/>
-          </a:solidFill>
-          <a:ln>
-            <a:noFill/>
-          </a:ln>
-        </p:spPr>
-        <p:style>
-          <a:lnRef idx="1">
-            <a:schemeClr val="accent1"/>
-          </a:lnRef>
-          <a:fillRef idx="3">
-            <a:schemeClr val="accent1"/>
-          </a:fillRef>
-          <a:effectRef idx="2">
-            <a:schemeClr val="accent1"/>
-          </a:effectRef>
-          <a:fontRef idx="minor">
-            <a:schemeClr val="lt1"/>
-          </a:fontRef>
-        </p:style>
-        <p:txBody>
-          <a:bodyPr rtlCol="0" anchor="ctr" tIns="91440"/>
-          <a:lstStyle/>
-          <a:p>
-            <a:pPr algn="ctr">
-              <a:defRPr sz="1600" b="1">
-                <a:solidFill>
-                  <a:srgbClr val="FFFFFF"/>
-                </a:solidFill>
-              </a:defRPr>
-            </a:pPr>
-            <a:r>
-              <a:t>traditional</a:t>
-            </a:r>
-          </a:p>
-        </p:txBody>
-      </p:sp>
-      <p:sp>
-        <p:nvSpPr>
-          <p:cNvPr id="18" name="TextBox 17"/>
-          <p:cNvSpPr txBox="1"/>
-          <p:nvPr/>
-        </p:nvSpPr>
-        <p:spPr>
-          <a:xfrm>
-            <a:off x="3108960" y="5166359"/>
-            <a:ext cx="6400800" cy="548640"/>
-          </a:xfrm>
-          <a:prstGeom prst="rect">
-            <a:avLst/>
-          </a:prstGeom>
-          <a:noFill/>
-        </p:spPr>
-        <p:txBody>
-          <a:bodyPr wrap="none">
-            <a:spAutoFit/>
-          </a:bodyPr>
-          <a:lstStyle/>
-          <a:p>
-            <a:pPr>
-              <a:defRPr sz="1800">
-                <a:solidFill>
-                  <a:srgbClr val="374151"/>
-                </a:solidFill>
-              </a:defRPr>
-            </a:pPr>
-            <a:r>
-              <a:t>망원2</a:t>
-            </a:r>
-          </a:p>
-        </p:txBody>
-      </p:sp>
-      <p:sp>
-        <p:nvSpPr>
-          <p:cNvPr id="19" name="TextBox 18"/>
-          <p:cNvSpPr txBox="1"/>
-          <p:nvPr/>
-        </p:nvSpPr>
-        <p:spPr>
-          <a:xfrm>
-            <a:off x="9601200" y="5166359"/>
-            <a:ext cx="2286000" cy="548640"/>
-          </a:xfrm>
-          <a:prstGeom prst="rect">
-            <a:avLst/>
-          </a:prstGeom>
-          <a:noFill/>
-        </p:spPr>
-        <p:txBody>
-          <a:bodyPr wrap="none">
-            <a:spAutoFit/>
-          </a:bodyPr>
-          <a:lstStyle/>
-          <a:p>
-            <a:pPr algn="ctr">
-              <a:defRPr sz="1600" b="1">
-                <a:solidFill>
-                  <a:srgbClr val="F59E0B"/>
-                </a:solidFill>
-              </a:defRPr>
-            </a:pPr>
-            <a:r>
-              <a:t>혼합 1.2</a:t>
-            </a:r>
-          </a:p>
-        </p:txBody>
-      </p:sp>
-      <p:sp>
-        <p:nvSpPr>
-          <p:cNvPr id="20" name="TextBox 19"/>
-          <p:cNvSpPr txBox="1"/>
-          <p:nvPr/>
-        </p:nvSpPr>
-        <p:spPr>
-          <a:xfrm>
-            <a:off x="914400" y="6126480"/>
-            <a:ext cx="10332720" cy="457200"/>
-          </a:xfrm>
-          <a:prstGeom prst="rect">
-            <a:avLst/>
-          </a:prstGeom>
-          <a:noFill/>
-        </p:spPr>
-        <p:txBody>
-          <a:bodyPr wrap="none">
-            <a:spAutoFit/>
-          </a:bodyPr>
-          <a:lstStyle/>
-          <a:p>
-            <a:pPr algn="l">
-              <a:defRPr sz="1400" i="1">
-                <a:solidFill>
-                  <a:srgbClr val="6B7280"/>
-                </a:solidFill>
-              </a:defRPr>
-            </a:pPr>
-            <a:r>
-              <a:t>DONG_CHARACTER → 매장 score에 cat_boost 직접 곱</a:t>
-            </a:r>
-          </a:p>
-        </p:txBody>
-      </p:sp>
-    </p:spTree>
-  </p:cSld>
-  <p:clrMapOvr>
-    <a:masterClrMapping/>
-  </p:clrMapOvr>
-</p:sld>
-</file>
-
-<file path=ppt/slides/slide8.xml><?xml version="1.0" encoding="utf-8"?>
-<p:sld xmlns:a="http://schemas.openxmlformats.org/drawingml/2006/main" xmlns:p="http://schemas.openxmlformats.org/presentationml/2006/main" xmlns:r="http://schemas.openxmlformats.org/officeDocument/2006/relationships">
-  <p:cSld>
-    <p:spTree>
-      <p:nvGrpSpPr>
-        <p:cNvPr id="1" name=""/>
-        <p:cNvGrpSpPr/>
-        <p:nvPr/>
-      </p:nvGrpSpPr>
-      <p:grpSpPr/>
-      <p:sp>
-        <p:nvSpPr>
-          <p:cNvPr id="2" name="Oval 1"/>
-          <p:cNvSpPr/>
-          <p:nvPr/>
-        </p:nvSpPr>
-        <p:spPr>
-          <a:xfrm>
-            <a:off x="548640" y="457200"/>
-            <a:ext cx="640080" cy="640080"/>
-          </a:xfrm>
-          <a:prstGeom prst="ellipse">
-            <a:avLst/>
-          </a:prstGeom>
-          <a:solidFill>
-            <a:srgbClr val="3B82F6"/>
-          </a:solidFill>
-          <a:ln>
-            <a:noFill/>
-          </a:ln>
-        </p:spPr>
-        <p:style>
-          <a:lnRef idx="1">
-            <a:schemeClr val="accent1"/>
-          </a:lnRef>
-          <a:fillRef idx="3">
-            <a:schemeClr val="accent1"/>
-          </a:fillRef>
-          <a:effectRef idx="2">
-            <a:schemeClr val="accent1"/>
-          </a:effectRef>
-          <a:fontRef idx="minor">
-            <a:schemeClr val="lt1"/>
-          </a:fontRef>
-        </p:style>
-        <p:txBody>
-          <a:bodyPr rtlCol="0" anchor="ctr" lIns="0" rIns="0" tIns="0" bIns="0"/>
-          <a:lstStyle/>
-          <a:p>
-            <a:pPr algn="ctr">
-              <a:defRPr sz="2200" b="1">
-                <a:solidFill>
-                  <a:srgbClr val="FFFFFF"/>
-                </a:solidFill>
-              </a:defRPr>
-            </a:pPr>
-            <a:r>
-              <a:t>8</a:t>
-            </a:r>
-          </a:p>
-        </p:txBody>
-      </p:sp>
-      <p:sp>
-        <p:nvSpPr>
-          <p:cNvPr id="3" name="TextBox 2"/>
-          <p:cNvSpPr txBox="1"/>
-          <p:nvPr/>
-        </p:nvSpPr>
-        <p:spPr>
-          <a:xfrm>
-            <a:off x="1371600" y="457200"/>
-            <a:ext cx="10058400" cy="640080"/>
-          </a:xfrm>
-          <a:prstGeom prst="rect">
-            <a:avLst/>
-          </a:prstGeom>
-          <a:noFill/>
-        </p:spPr>
-        <p:txBody>
-          <a:bodyPr wrap="none">
-            <a:spAutoFit/>
-          </a:bodyPr>
-          <a:lstStyle/>
-          <a:p>
-            <a:pPr>
-              <a:defRPr sz="3200" b="1">
-                <a:solidFill>
-                  <a:srgbClr val="1F2D4E"/>
-                </a:solidFill>
-              </a:defRPr>
-            </a:pPr>
-            <a:r>
-              <a:t>결과 — 학술 최첨단 수준 + 비용 $0</a:t>
-            </a:r>
-          </a:p>
-        </p:txBody>
-      </p:sp>
-      <p:sp>
-        <p:nvSpPr>
-          <p:cNvPr id="4" name="Rectangle 3"/>
-          <p:cNvSpPr/>
-          <p:nvPr/>
-        </p:nvSpPr>
-        <p:spPr>
-          <a:xfrm>
-            <a:off x="548640" y="1234440"/>
-            <a:ext cx="1371600" cy="45720"/>
-          </a:xfrm>
-          <a:prstGeom prst="rect">
-            <a:avLst/>
-          </a:prstGeom>
-          <a:solidFill>
-            <a:srgbClr val="3B82F6"/>
-          </a:solidFill>
-          <a:ln>
-            <a:noFill/>
-          </a:ln>
-        </p:spPr>
-        <p:style>
-          <a:lnRef idx="1">
-            <a:schemeClr val="accent1"/>
-          </a:lnRef>
-          <a:fillRef idx="3">
-            <a:schemeClr val="accent1"/>
-          </a:fillRef>
-          <a:effectRef idx="2">
-            <a:schemeClr val="accent1"/>
-          </a:effectRef>
-          <a:fontRef idx="minor">
-            <a:schemeClr val="lt1"/>
-          </a:fontRef>
-        </p:style>
-        <p:txBody>
-          <a:bodyPr rtlCol="0" anchor="ctr"/>
-          <a:lstStyle/>
-          <a:p>
-            <a:pPr algn="ctr"/>
-          </a:p>
-        </p:txBody>
-      </p:sp>
-      <p:sp>
-        <p:nvSpPr>
-          <p:cNvPr id="5" name="Rounded Rectangle 4"/>
-          <p:cNvSpPr/>
-          <p:nvPr/>
-        </p:nvSpPr>
-        <p:spPr>
-          <a:xfrm>
-            <a:off x="914400" y="1737360"/>
-            <a:ext cx="3200400" cy="1828800"/>
-          </a:xfrm>
-          <a:prstGeom prst="roundRect">
-            <a:avLst/>
-          </a:prstGeom>
-          <a:solidFill>
-            <a:srgbClr val="F3F4F6"/>
-          </a:solidFill>
-          <a:ln w="25400">
-            <a:solidFill>
-              <a:srgbClr val="10B981"/>
-            </a:solidFill>
-          </a:ln>
-        </p:spPr>
-        <p:style>
-          <a:lnRef idx="1">
-            <a:schemeClr val="accent1"/>
-          </a:lnRef>
-          <a:fillRef idx="3">
-            <a:schemeClr val="accent1"/>
-          </a:fillRef>
-          <a:effectRef idx="2">
-            <a:schemeClr val="accent1"/>
-          </a:effectRef>
-          <a:fontRef idx="minor">
-            <a:schemeClr val="lt1"/>
-          </a:fontRef>
-        </p:style>
-        <p:txBody>
-          <a:bodyPr rtlCol="0" anchor="ctr" wrap="square" tIns="182880"/>
-          <a:lstStyle/>
-          <a:p>
-            <a:pPr algn="ctr">
-              <a:defRPr sz="4400" b="1">
-                <a:solidFill>
-                  <a:srgbClr val="10B981"/>
-                </a:solidFill>
-              </a:defRPr>
-            </a:pPr>
-            <a:r>
-              <a:t>4.6%</a:t>
-            </a:r>
-          </a:p>
-          <a:p>
-            <a:pPr algn="ctr">
-              <a:defRPr sz="1400">
-                <a:solidFill>
-                  <a:srgbClr val="374151"/>
-                </a:solidFill>
-              </a:defRPr>
-            </a:pPr>
-            <a:r>
-              <a:t>RMSE</a:t>
-            </a:r>
-          </a:p>
-        </p:txBody>
-      </p:sp>
-      <p:sp>
-        <p:nvSpPr>
-          <p:cNvPr id="6" name="Rounded Rectangle 5"/>
-          <p:cNvSpPr/>
-          <p:nvPr/>
-        </p:nvSpPr>
-        <p:spPr>
-          <a:xfrm>
-            <a:off x="4480560" y="1737360"/>
-            <a:ext cx="3200400" cy="1828800"/>
-          </a:xfrm>
-          <a:prstGeom prst="roundRect">
-            <a:avLst/>
-          </a:prstGeom>
-          <a:solidFill>
-            <a:srgbClr val="F3F4F6"/>
-          </a:solidFill>
-          <a:ln w="25400">
-            <a:solidFill>
-              <a:srgbClr val="3B82F6"/>
-            </a:solidFill>
-          </a:ln>
-        </p:spPr>
-        <p:style>
-          <a:lnRef idx="1">
-            <a:schemeClr val="accent1"/>
-          </a:lnRef>
-          <a:fillRef idx="3">
-            <a:schemeClr val="accent1"/>
-          </a:fillRef>
-          <a:effectRef idx="2">
-            <a:schemeClr val="accent1"/>
-          </a:effectRef>
-          <a:fontRef idx="minor">
-            <a:schemeClr val="lt1"/>
-          </a:fontRef>
-        </p:style>
-        <p:txBody>
-          <a:bodyPr rtlCol="0" anchor="ctr" wrap="square" tIns="182880"/>
-          <a:lstStyle/>
-          <a:p>
-            <a:pPr algn="ctr">
-              <a:defRPr sz="4400" b="1">
-                <a:solidFill>
-                  <a:srgbClr val="3B82F6"/>
-                </a:solidFill>
-              </a:defRPr>
-            </a:pPr>
-            <a:r>
-              <a:t>0.69</a:t>
-            </a:r>
-          </a:p>
-          <a:p>
-            <a:pPr algn="ctr">
-              <a:defRPr sz="1400">
-                <a:solidFill>
-                  <a:srgbClr val="374151"/>
-                </a:solidFill>
-              </a:defRPr>
-            </a:pPr>
-            <a:r>
-              <a:t>Pearson r</a:t>
-            </a:r>
-          </a:p>
-        </p:txBody>
-      </p:sp>
-      <p:sp>
-        <p:nvSpPr>
-          <p:cNvPr id="7" name="Rounded Rectangle 6"/>
-          <p:cNvSpPr/>
-          <p:nvPr/>
-        </p:nvSpPr>
-        <p:spPr>
-          <a:xfrm>
-            <a:off x="8046720" y="1737360"/>
-            <a:ext cx="3200400" cy="1828800"/>
-          </a:xfrm>
-          <a:prstGeom prst="roundRect">
-            <a:avLst/>
-          </a:prstGeom>
-          <a:solidFill>
-            <a:srgbClr val="F3F4F6"/>
-          </a:solidFill>
-          <a:ln w="25400">
-            <a:solidFill>
-              <a:srgbClr val="8B5CF6"/>
-            </a:solidFill>
-          </a:ln>
-        </p:spPr>
-        <p:style>
-          <a:lnRef idx="1">
-            <a:schemeClr val="accent1"/>
-          </a:lnRef>
-          <a:fillRef idx="3">
-            <a:schemeClr val="accent1"/>
-          </a:fillRef>
-          <a:effectRef idx="2">
-            <a:schemeClr val="accent1"/>
-          </a:effectRef>
-          <a:fontRef idx="minor">
-            <a:schemeClr val="lt1"/>
-          </a:fontRef>
-        </p:style>
-        <p:txBody>
-          <a:bodyPr rtlCol="0" anchor="ctr" wrap="square" tIns="182880"/>
-          <a:lstStyle/>
-          <a:p>
-            <a:pPr algn="ctr">
-              <a:defRPr sz="4400" b="1">
-                <a:solidFill>
-                  <a:srgbClr val="8B5CF6"/>
-                </a:solidFill>
-              </a:defRPr>
-            </a:pPr>
-            <a:r>
-              <a:t>92%</a:t>
-            </a:r>
-          </a:p>
-          <a:p>
-            <a:pPr algn="ctr">
-              <a:defRPr sz="1400">
-                <a:solidFill>
-                  <a:srgbClr val="374151"/>
-                </a:solidFill>
-              </a:defRPr>
-            </a:pPr>
-            <a:r>
-              <a:t>External 귀환</a:t>
-            </a:r>
-          </a:p>
-        </p:txBody>
-      </p:sp>
-      <p:graphicFrame>
-        <p:nvGraphicFramePr>
-          <p:cNvPr id="8" name="Table 7"/>
-          <p:cNvGraphicFramePr>
-            <a:graphicFrameLocks noGrp="1"/>
-          </p:cNvGraphicFramePr>
-          <p:nvPr/>
-        </p:nvGraphicFramePr>
-        <p:xfrm>
-          <a:off x="914400" y="3749039"/>
-          <a:ext cx="10332720" cy="2194560"/>
-        </p:xfrm>
-        <a:graphic>
-          <a:graphicData uri="http://schemas.openxmlformats.org/drawingml/2006/table">
-            <a:tbl>
-              <a:tblPr firstRow="1" bandRow="1">
-                <a:tableStyleId>{5C22544A-7EE6-4342-B048-85BDC9FD1C3A}</a:tableStyleId>
-              </a:tblPr>
-              <a:tblGrid>
-                <a:gridCol w="3200400"/>
-                <a:gridCol w="1828800"/>
-                <a:gridCol w="2286000"/>
-                <a:gridCol w="3017520"/>
-              </a:tblGrid>
-              <a:tr h="438912">
-                <a:tc>
-                  <a:txBody>
-                    <a:bodyPr/>
-                    <a:lstStyle/>
-                    <a:p>
-                      <a:pPr algn="l"/>
-                      <a:r>
-                        <a:rPr sz="1500" b="1">
-                          <a:solidFill>
-                            <a:srgbClr val="FFFFFF"/>
-                          </a:solidFill>
-                        </a:rPr>
-                        <a:t>연구 / 모델</a:t>
-                      </a:r>
-                    </a:p>
-                  </a:txBody>
-                  <a:tcPr>
-                    <a:solidFill>
-                      <a:srgbClr val="1F2D4E"/>
-                    </a:solidFill>
-                  </a:tcPr>
-                </a:tc>
-                <a:tc>
-                  <a:txBody>
-                    <a:bodyPr/>
-                    <a:lstStyle/>
-                    <a:p>
-                      <a:pPr algn="l"/>
-                      <a:r>
-                        <a:rPr sz="1500" b="1">
-                          <a:solidFill>
-                            <a:srgbClr val="FFFFFF"/>
-                          </a:solidFill>
-                        </a:rPr>
-                        <a:t>Pearson r</a:t>
-                      </a:r>
-                    </a:p>
-                  </a:txBody>
-                  <a:tcPr>
-                    <a:solidFill>
-                      <a:srgbClr val="1F2D4E"/>
-                    </a:solidFill>
-                  </a:tcPr>
-                </a:tc>
-                <a:tc>
-                  <a:txBody>
-                    <a:bodyPr/>
-                    <a:lstStyle/>
-                    <a:p>
-                      <a:pPr algn="l"/>
-                      <a:r>
-                        <a:rPr sz="1500" b="1">
-                          <a:solidFill>
-                            <a:srgbClr val="FFFFFF"/>
-                          </a:solidFill>
-                        </a:rPr>
-                        <a:t>RMSE / MAPE</a:t>
-                      </a:r>
-                    </a:p>
-                  </a:txBody>
-                  <a:tcPr>
-                    <a:solidFill>
-                      <a:srgbClr val="1F2D4E"/>
-                    </a:solidFill>
-                  </a:tcPr>
-                </a:tc>
-                <a:tc>
-                  <a:txBody>
-                    <a:bodyPr/>
-                    <a:lstStyle/>
-                    <a:p>
-                      <a:pPr algn="l"/>
-                      <a:r>
-                        <a:rPr sz="1500" b="1">
-                          <a:solidFill>
-                            <a:srgbClr val="FFFFFF"/>
-                          </a:solidFill>
-                        </a:rPr>
-                        <a:t>단위</a:t>
-                      </a:r>
-                    </a:p>
-                  </a:txBody>
-                  <a:tcPr>
-                    <a:solidFill>
-                      <a:srgbClr val="1F2D4E"/>
-                    </a:solidFill>
-                  </a:tcPr>
-                </a:tc>
-              </a:tr>
-              <a:tr h="438912">
-                <a:tc>
-                  <a:txBody>
-                    <a:bodyPr/>
-                    <a:lstStyle/>
-                    <a:p>
-                      <a:pPr algn="l"/>
-                      <a:r>
-                        <a:rPr sz="1500" b="1">
-                          <a:solidFill>
-                            <a:srgbClr val="374151"/>
-                          </a:solidFill>
-                        </a:rPr>
-                        <a:t>우리 ABM (v12)</a:t>
-                      </a:r>
-                    </a:p>
-                  </a:txBody>
-                  <a:tcPr>
-                    <a:solidFill>
-                      <a:srgbClr val="DCFCE7"/>
-                    </a:solidFill>
-                  </a:tcPr>
-                </a:tc>
-                <a:tc>
-                  <a:txBody>
-                    <a:bodyPr/>
-                    <a:lstStyle/>
-                    <a:p>
-                      <a:pPr algn="l"/>
-                      <a:r>
-                        <a:rPr sz="1500" b="1">
-                          <a:solidFill>
-                            <a:srgbClr val="374151"/>
-                          </a:solidFill>
-                        </a:rPr>
-                        <a:t>0.688</a:t>
-                      </a:r>
-                    </a:p>
-                  </a:txBody>
-                  <a:tcPr>
-                    <a:solidFill>
-                      <a:srgbClr val="DCFCE7"/>
-                    </a:solidFill>
-                  </a:tcPr>
-                </a:tc>
-                <a:tc>
-                  <a:txBody>
-                    <a:bodyPr/>
-                    <a:lstStyle/>
-                    <a:p>
-                      <a:pPr algn="l"/>
-                      <a:r>
-                        <a:rPr sz="1500" b="1">
-                          <a:solidFill>
-                            <a:srgbClr val="374151"/>
-                          </a:solidFill>
-                        </a:rPr>
-                        <a:t>4.6%</a:t>
-                      </a:r>
-                    </a:p>
-                  </a:txBody>
-                  <a:tcPr>
-                    <a:solidFill>
-                      <a:srgbClr val="DCFCE7"/>
-                    </a:solidFill>
-                  </a:tcPr>
-                </a:tc>
-                <a:tc>
-                  <a:txBody>
-                    <a:bodyPr/>
-                    <a:lstStyle/>
-                    <a:p>
-                      <a:pPr algn="l"/>
-                      <a:r>
-                        <a:rPr sz="1500" b="1">
-                          <a:solidFill>
-                            <a:srgbClr val="374151"/>
-                          </a:solidFill>
-                        </a:rPr>
-                        <a:t>visit ↔ presence</a:t>
-                      </a:r>
-                    </a:p>
-                  </a:txBody>
-                  <a:tcPr>
-                    <a:solidFill>
-                      <a:srgbClr val="DCFCE7"/>
-                    </a:solidFill>
-                  </a:tcPr>
-                </a:tc>
-              </a:tr>
-              <a:tr h="438912">
-                <a:tc>
-                  <a:txBody>
-                    <a:bodyPr/>
-                    <a:lstStyle/>
-                    <a:p>
-                      <a:pPr algn="l"/>
-                      <a:r>
-                        <a:rPr sz="1500" b="0">
-                          <a:solidFill>
-                            <a:srgbClr val="374151"/>
-                          </a:solidFill>
-                        </a:rPr>
-                        <a:t>Crols &amp; Malleson 2019</a:t>
-                      </a:r>
-                    </a:p>
-                  </a:txBody>
-                  <a:tcPr>
-                    <a:solidFill>
-                      <a:srgbClr val="F3F4F6"/>
-                    </a:solidFill>
-                  </a:tcPr>
-                </a:tc>
-                <a:tc>
-                  <a:txBody>
-                    <a:bodyPr/>
-                    <a:lstStyle/>
-                    <a:p>
-                      <a:pPr algn="l"/>
-                      <a:r>
-                        <a:rPr sz="1500" b="0">
-                          <a:solidFill>
-                            <a:srgbClr val="374151"/>
-                          </a:solidFill>
-                        </a:rPr>
-                        <a:t>0.7~0.9</a:t>
-                      </a:r>
-                    </a:p>
-                  </a:txBody>
-                  <a:tcPr>
-                    <a:solidFill>
-                      <a:srgbClr val="F3F4F6"/>
-                    </a:solidFill>
-                  </a:tcPr>
-                </a:tc>
-                <a:tc>
-                  <a:txBody>
-                    <a:bodyPr/>
-                    <a:lstStyle/>
-                    <a:p>
-                      <a:pPr algn="l"/>
-                      <a:r>
-                        <a:rPr sz="1500" b="0">
-                          <a:solidFill>
-                            <a:srgbClr val="374151"/>
-                          </a:solidFill>
-                        </a:rPr>
-                        <a:t>MAPE 10~25%</a:t>
-                      </a:r>
-                    </a:p>
-                  </a:txBody>
-                  <a:tcPr>
-                    <a:solidFill>
-                      <a:srgbClr val="F3F4F6"/>
-                    </a:solidFill>
-                  </a:tcPr>
-                </a:tc>
-                <a:tc>
-                  <a:txBody>
-                    <a:bodyPr/>
-                    <a:lstStyle/>
-                    <a:p>
-                      <a:pPr algn="l"/>
-                      <a:r>
-                        <a:rPr sz="1500" b="0">
-                          <a:solidFill>
-                            <a:srgbClr val="374151"/>
-                          </a:solidFill>
-                        </a:rPr>
-                        <a:t>pedestrian count (최첨단)</a:t>
-                      </a:r>
-                    </a:p>
-                  </a:txBody>
-                  <a:tcPr>
-                    <a:solidFill>
-                      <a:srgbClr val="F3F4F6"/>
-                    </a:solidFill>
-                  </a:tcPr>
-                </a:tc>
-              </a:tr>
-              <a:tr h="438912">
-                <a:tc>
-                  <a:txBody>
-                    <a:bodyPr/>
-                    <a:lstStyle/>
-                    <a:p>
-                      <a:pPr algn="l"/>
-                      <a:r>
-                        <a:rPr sz="1500" b="0">
-                          <a:solidFill>
-                            <a:srgbClr val="374151"/>
-                          </a:solidFill>
-                        </a:rPr>
-                        <a:t>Sommet &amp; Lipps 2025</a:t>
-                      </a:r>
-                    </a:p>
-                  </a:txBody>
-                  <a:tcPr>
-                    <a:solidFill>
-                      <a:srgbClr val="FFFFFF"/>
-                    </a:solidFill>
-                  </a:tcPr>
-                </a:tc>
-                <a:tc>
-                  <a:txBody>
-                    <a:bodyPr/>
-                    <a:lstStyle/>
-                    <a:p>
-                      <a:pPr algn="l"/>
-                      <a:r>
-                        <a:rPr sz="1500" b="0">
-                          <a:solidFill>
-                            <a:srgbClr val="374151"/>
-                          </a:solidFill>
-                        </a:rPr>
-                        <a:t>0.5~0.85</a:t>
-                      </a:r>
-                    </a:p>
-                  </a:txBody>
-                  <a:tcPr>
-                    <a:solidFill>
-                      <a:srgbClr val="FFFFFF"/>
-                    </a:solidFill>
-                  </a:tcPr>
-                </a:tc>
-                <a:tc>
-                  <a:txBody>
-                    <a:bodyPr/>
-                    <a:lstStyle/>
-                    <a:p>
-                      <a:pPr algn="l"/>
-                      <a:r>
-                        <a:rPr sz="1500" b="0">
-                          <a:solidFill>
-                            <a:srgbClr val="374151"/>
-                          </a:solidFill>
-                        </a:rPr>
-                        <a:t>—</a:t>
-                      </a:r>
-                    </a:p>
-                  </a:txBody>
-                  <a:tcPr>
-                    <a:solidFill>
-                      <a:srgbClr val="FFFFFF"/>
-                    </a:solidFill>
-                  </a:tcPr>
-                </a:tc>
-                <a:tc>
-                  <a:txBody>
-                    <a:bodyPr/>
-                    <a:lstStyle/>
-                    <a:p>
-                      <a:pPr algn="l"/>
-                      <a:r>
-                        <a:rPr sz="1500" b="0">
-                          <a:solidFill>
-                            <a:srgbClr val="374151"/>
-                          </a:solidFill>
-                        </a:rPr>
-                        <a:t>panel stock</a:t>
-                      </a:r>
-                    </a:p>
-                  </a:txBody>
-                  <a:tcPr>
-                    <a:solidFill>
-                      <a:srgbClr val="FFFFFF"/>
-                    </a:solidFill>
-                  </a:tcPr>
-                </a:tc>
-              </a:tr>
-              <a:tr h="438912">
-                <a:tc>
-                  <a:txBody>
-                    <a:bodyPr/>
-                    <a:lstStyle/>
-                    <a:p>
-                      <a:pPr algn="l"/>
-                      <a:r>
-                        <a:rPr sz="1500" b="0">
-                          <a:solidFill>
-                            <a:srgbClr val="374151"/>
-                          </a:solidFill>
-                        </a:rPr>
-                        <a:t>Brussels 2024 (천장)</a:t>
-                      </a:r>
-                    </a:p>
-                  </a:txBody>
-                  <a:tcPr>
-                    <a:solidFill>
-                      <a:srgbClr val="F3F4F6"/>
-                    </a:solidFill>
-                  </a:tcPr>
-                </a:tc>
-                <a:tc>
-                  <a:txBody>
-                    <a:bodyPr/>
-                    <a:lstStyle/>
-                    <a:p>
-                      <a:pPr algn="l"/>
-                      <a:r>
-                        <a:rPr sz="1500" b="0">
-                          <a:solidFill>
-                            <a:srgbClr val="374151"/>
-                          </a:solidFill>
-                        </a:rPr>
-                        <a:t>0.96</a:t>
-                      </a:r>
-                    </a:p>
-                  </a:txBody>
-                  <a:tcPr>
-                    <a:solidFill>
-                      <a:srgbClr val="F3F4F6"/>
-                    </a:solidFill>
-                  </a:tcPr>
-                </a:tc>
-                <a:tc>
-                  <a:txBody>
-                    <a:bodyPr/>
-                    <a:lstStyle/>
-                    <a:p>
-                      <a:pPr algn="l"/>
-                      <a:r>
-                        <a:rPr sz="1500" b="0">
-                          <a:solidFill>
-                            <a:srgbClr val="374151"/>
-                          </a:solidFill>
-                        </a:rPr>
-                        <a:t>—</a:t>
-                      </a:r>
-                    </a:p>
-                  </a:txBody>
-                  <a:tcPr>
-                    <a:solidFill>
-                      <a:srgbClr val="F3F4F6"/>
-                    </a:solidFill>
-                  </a:tcPr>
-                </a:tc>
-                <a:tc>
-                  <a:txBody>
-                    <a:bodyPr/>
-                    <a:lstStyle/>
-                    <a:p>
-                      <a:pPr algn="l"/>
-                      <a:r>
-                        <a:rPr sz="1500" b="0">
-                          <a:solidFill>
-                            <a:srgbClr val="374151"/>
-                          </a:solidFill>
-                        </a:rPr>
-                        <a:t>trip ↔ trip (같은 단위)</a:t>
-                      </a:r>
-                    </a:p>
-                  </a:txBody>
-                  <a:tcPr>
-                    <a:solidFill>
-                      <a:srgbClr val="F3F4F6"/>
-                    </a:solidFill>
-                  </a:tcPr>
-                </a:tc>
-              </a:tr>
-            </a:tbl>
-          </a:graphicData>
-        </a:graphic>
-      </p:graphicFrame>
-      <p:sp>
-        <p:nvSpPr>
-          <p:cNvPr id="9" name="Rounded Rectangle 8"/>
-          <p:cNvSpPr/>
-          <p:nvPr/>
-        </p:nvSpPr>
-        <p:spPr>
-          <a:xfrm>
-            <a:off x="914400" y="6080760"/>
-            <a:ext cx="10332720" cy="502920"/>
-          </a:xfrm>
-          <a:prstGeom prst="roundRect">
-            <a:avLst/>
-          </a:prstGeom>
-          <a:solidFill>
-            <a:srgbClr val="F3F4F6"/>
-          </a:solidFill>
-          <a:ln w="19050">
-            <a:solidFill>
-              <a:srgbClr val="10B981"/>
-            </a:solidFill>
-          </a:ln>
-        </p:spPr>
-        <p:style>
-          <a:lnRef idx="1">
-            <a:schemeClr val="accent1"/>
-          </a:lnRef>
-          <a:fillRef idx="3">
-            <a:schemeClr val="accent1"/>
-          </a:fillRef>
-          <a:effectRef idx="2">
-            <a:schemeClr val="accent1"/>
-          </a:effectRef>
-          <a:fontRef idx="minor">
-            <a:schemeClr val="lt1"/>
-          </a:fontRef>
-        </p:style>
-        <p:txBody>
-          <a:bodyPr rtlCol="0" anchor="ctr" lIns="182880" tIns="73152"/>
-          <a:lstStyle/>
-          <a:p>
-            <a:pPr algn="ctr">
-              <a:defRPr sz="1400" i="1">
-                <a:solidFill>
-                  <a:srgbClr val="374151"/>
-                </a:solidFill>
-              </a:defRPr>
-            </a:pPr>
-            <a:r>
-              <a:t>v12 = Crols 2019 최첨단(Pearson 0.7~0.9) 하단 + RMSE는 그보다 낮음 — 비용 $0로 달성</a:t>
+              <a:t>마포 카페 시장은 신규 진입에 zero-sum — 새 카페 손님은 동 다른 카페 손님 이동</a:t>
             </a:r>
           </a:p>
         </p:txBody>
